--- a/docs/security/zeus-doc/docs/NHS-Bid-Pitch-Deck-ZEUSTA.pptx
+++ b/docs/security/zeus-doc/docs/NHS-Bid-Pitch-Deck-ZEUSTA.pptx
@@ -12,9 +12,10 @@
     <p:sldId id="260" r:id="rId6"/>
     <p:sldId id="261" r:id="rId7"/>
     <p:sldId id="262" r:id="rId8"/>
+    <p:sldId id="263" r:id="rId9"/>
   </p:sldIdLst>
   <p:notesMasterIdLst>
-    <p:notesMasterId r:id="rId9"/>
+    <p:notesMasterId r:id="rId10"/>
   </p:notesMasterIdLst>
   <p:sldSz cx="9144000" cy="5143500"/>
   <p:notesSz cx="5143500" cy="9144000"/>
@@ -1060,6 +1061,94 @@
             <a:fld id="{F7021451-1387-4CA6-816F-3879F97B5CBC}" type="slidenum">
               <a:rPr lang="en-US"/>
               <a:t>7</a:t>
+            </a:fld>
+            <a:endParaRPr lang="en-US"/>
+          </a:p>
+        </p:txBody>
+      </p:sp>
+    </p:spTree>
+    <p:extLst>
+      <p:ext uri="{BB962C8B-B14F-4D97-AF65-F5344CB8AC3E}">
+        <p14:creationId xmlns:p14="http://schemas.microsoft.com/office/powerpoint/2010/main" val="1024086991"/>
+      </p:ext>
+    </p:extLst>
+  </p:cSld>
+  <p:clrMapOvr>
+    <a:masterClrMapping/>
+  </p:clrMapOvr>
+</p:notes>
+</file>
+
+<file path=ppt/notesSlides/notesSlide8.xml><?xml version="1.0" encoding="utf-8"?>
+<p:notes xmlns:a="http://schemas.openxmlformats.org/drawingml/2006/main" xmlns:r="http://schemas.openxmlformats.org/officeDocument/2006/relationships" xmlns:p="http://schemas.openxmlformats.org/presentationml/2006/main">
+  <p:cSld>
+    <p:spTree>
+      <p:nvGrpSpPr>
+        <p:cNvPr id="1" name=""/>
+        <p:cNvGrpSpPr/>
+        <p:nvPr/>
+      </p:nvGrpSpPr>
+      <p:grpSpPr>
+        <a:xfrm>
+          <a:off x="0" y="0"/>
+          <a:ext cx="0" cy="0"/>
+          <a:chOff x="0" y="0"/>
+          <a:chExt cx="0" cy="0"/>
+        </a:xfrm>
+      </p:grpSpPr>
+      <p:sp>
+        <p:nvSpPr>
+          <p:cNvPr id="2" name="Slide Image Placeholder 1"/>
+          <p:cNvSpPr>
+            <a:spLocks noGrp="1" noRot="1" noChangeAspect="1"/>
+          </p:cNvSpPr>
+          <p:nvPr>
+            <p:ph type="sldImg"/>
+          </p:nvPr>
+        </p:nvSpPr>
+        <p:spPr/>
+      </p:sp>
+      <p:sp>
+        <p:nvSpPr>
+          <p:cNvPr id="3" name="Notes Placeholder 2"/>
+          <p:cNvSpPr>
+            <a:spLocks noGrp="1"/>
+          </p:cNvSpPr>
+          <p:nvPr>
+            <p:ph type="body" idx="1"/>
+          </p:nvPr>
+        </p:nvSpPr>
+        <p:spPr/>
+        <p:txBody>
+          <a:bodyPr/>
+          <a:lstStyle/>
+          <a:p>
+            <a:r>
+              <a:rPr lang="en-US" dirty="0"/>
+              <a:t/>
+            </a:r>
+            <a:endParaRPr lang="en-US" dirty="0"/>
+          </a:p>
+        </p:txBody>
+      </p:sp>
+      <p:sp>
+        <p:nvSpPr>
+          <p:cNvPr id="4" name="Slide Number Placeholder 3"/>
+          <p:cNvSpPr>
+            <a:spLocks noGrp="1"/>
+          </p:cNvSpPr>
+          <p:nvPr>
+            <p:ph type="sldNum" sz="quarter" idx="10"/>
+          </p:nvPr>
+        </p:nvSpPr>
+        <p:spPr/>
+        <p:txBody>
+          <a:bodyPr/>
+          <a:lstStyle/>
+          <a:p>
+            <a:fld id="{F7021451-1387-4CA6-816F-3879F97B5CBC}" type="slidenum">
+              <a:rPr lang="en-US"/>
+              <a:t>8</a:t>
             </a:fld>
             <a:endParaRPr lang="en-US"/>
           </a:p>
@@ -5186,6 +5275,902 @@
                   <a:srgbClr val="4FCEE4"/>
                 </a:solidFill>
               </a:rPr>
+              <a:t>COMMERCIAL MODEL — TIERS</a:t>
+            </a:r>
+            <a:endParaRPr lang="en-US" sz="2200" dirty="0"/>
+          </a:p>
+        </p:txBody>
+      </p:sp>
+      <p:sp>
+        <p:nvSpPr>
+          <p:cNvPr id="3" name="Text 1"/>
+          <p:cNvSpPr/>
+          <p:nvPr/>
+        </p:nvSpPr>
+        <p:spPr>
+          <a:xfrm>
+            <a:off x="548640" y="914400"/>
+            <a:ext cx="8046720" cy="365760"/>
+          </a:xfrm>
+          <a:prstGeom prst="rect">
+            <a:avLst/>
+          </a:prstGeom>
+          <a:noFill/>
+          <a:ln/>
+        </p:spPr>
+        <p:txBody>
+          <a:bodyPr wrap="square" rtlCol="0" anchor="ctr"/>
+          <a:lstStyle/>
+          <a:p>
+            <a:pPr indent="0" marL="0">
+              <a:buNone/>
+            </a:pPr>
+            <a:r>
+              <a:rPr lang="en-US" sz="1300" dirty="0">
+                <a:solidFill>
+                  <a:srgbClr val="9AA0AC"/>
+                </a:solidFill>
+              </a:rPr>
+              <a:t>Anchored to the programme business case: £24.4B value · 28.2x ROI · 10yr NHS England. Indicative, negotiable.</a:t>
+            </a:r>
+            <a:endParaRPr lang="en-US" sz="1300" dirty="0"/>
+          </a:p>
+        </p:txBody>
+      </p:sp>
+      <p:sp>
+        <p:nvSpPr>
+          <p:cNvPr id="4" name="Shape 2"/>
+          <p:cNvSpPr/>
+          <p:nvPr/>
+        </p:nvSpPr>
+        <p:spPr>
+          <a:xfrm>
+            <a:off x="548640" y="1463040"/>
+            <a:ext cx="8046720" cy="621792"/>
+          </a:xfrm>
+          <a:prstGeom prst="roundRect">
+            <a:avLst>
+              <a:gd name="adj" fmla="val 10294"/>
+            </a:avLst>
+          </a:prstGeom>
+          <a:solidFill>
+            <a:srgbClr val="1B2030"/>
+          </a:solidFill>
+          <a:ln w="6350">
+            <a:solidFill>
+              <a:srgbClr val="4FCEE4"/>
+            </a:solidFill>
+            <a:prstDash val="solid"/>
+          </a:ln>
+        </p:spPr>
+      </p:sp>
+      <p:sp>
+        <p:nvSpPr>
+          <p:cNvPr id="5" name="Text 3"/>
+          <p:cNvSpPr/>
+          <p:nvPr/>
+        </p:nvSpPr>
+        <p:spPr>
+          <a:xfrm>
+            <a:off x="731520" y="1554480"/>
+            <a:ext cx="1645920" cy="411480"/>
+          </a:xfrm>
+          <a:prstGeom prst="rect">
+            <a:avLst/>
+          </a:prstGeom>
+          <a:noFill/>
+          <a:ln/>
+        </p:spPr>
+        <p:txBody>
+          <a:bodyPr wrap="square" rtlCol="0" anchor="ctr"/>
+          <a:lstStyle/>
+          <a:p>
+            <a:pPr indent="0" marL="0">
+              <a:buNone/>
+            </a:pPr>
+            <a:r>
+              <a:rPr lang="en-US" sz="1300" b="1" dirty="0">
+                <a:solidFill>
+                  <a:srgbClr val="D9F24B"/>
+                </a:solidFill>
+              </a:rPr>
+              <a:t>Pilot</a:t>
+            </a:r>
+            <a:endParaRPr lang="en-US" sz="1300" dirty="0"/>
+          </a:p>
+        </p:txBody>
+      </p:sp>
+      <p:sp>
+        <p:nvSpPr>
+          <p:cNvPr id="6" name="Text 4"/>
+          <p:cNvSpPr/>
+          <p:nvPr/>
+        </p:nvSpPr>
+        <p:spPr>
+          <a:xfrm>
+            <a:off x="2377440" y="1554480"/>
+            <a:ext cx="3108960" cy="411480"/>
+          </a:xfrm>
+          <a:prstGeom prst="rect">
+            <a:avLst/>
+          </a:prstGeom>
+          <a:noFill/>
+          <a:ln/>
+        </p:spPr>
+        <p:txBody>
+          <a:bodyPr wrap="square" rtlCol="0" anchor="ctr"/>
+          <a:lstStyle/>
+          <a:p>
+            <a:pPr indent="0" marL="0">
+              <a:buNone/>
+            </a:pPr>
+            <a:r>
+              <a:rPr lang="en-US" sz="1050" dirty="0">
+                <a:solidFill>
+                  <a:srgbClr val="FFFFFF"/>
+                </a:solidFill>
+              </a:rPr>
+              <a:t>One ICB / trust region — ZEUS DOC + AEGIS + 100k cards</a:t>
+            </a:r>
+            <a:endParaRPr lang="en-US" sz="1050" dirty="0"/>
+          </a:p>
+        </p:txBody>
+      </p:sp>
+      <p:sp>
+        <p:nvSpPr>
+          <p:cNvPr id="7" name="Text 5"/>
+          <p:cNvSpPr/>
+          <p:nvPr/>
+        </p:nvSpPr>
+        <p:spPr>
+          <a:xfrm>
+            <a:off x="5577840" y="1554480"/>
+            <a:ext cx="1554480" cy="411480"/>
+          </a:xfrm>
+          <a:prstGeom prst="rect">
+            <a:avLst/>
+          </a:prstGeom>
+          <a:noFill/>
+          <a:ln/>
+        </p:spPr>
+        <p:txBody>
+          <a:bodyPr wrap="square" rtlCol="0" anchor="ctr"/>
+          <a:lstStyle/>
+          <a:p>
+            <a:pPr indent="0" marL="0">
+              <a:buNone/>
+            </a:pPr>
+            <a:r>
+              <a:rPr lang="en-US" sz="1150" b="1" dirty="0">
+                <a:solidFill>
+                  <a:srgbClr val="4FCEE4"/>
+                </a:solidFill>
+              </a:rPr>
+              <a:t>£1.0M / yr</a:t>
+            </a:r>
+            <a:endParaRPr lang="en-US" sz="1150" dirty="0"/>
+          </a:p>
+        </p:txBody>
+      </p:sp>
+      <p:sp>
+        <p:nvSpPr>
+          <p:cNvPr id="8" name="Text 6"/>
+          <p:cNvSpPr/>
+          <p:nvPr/>
+        </p:nvSpPr>
+        <p:spPr>
+          <a:xfrm>
+            <a:off x="7223760" y="1554480"/>
+            <a:ext cx="1371600" cy="411480"/>
+          </a:xfrm>
+          <a:prstGeom prst="rect">
+            <a:avLst/>
+          </a:prstGeom>
+          <a:noFill/>
+          <a:ln/>
+        </p:spPr>
+        <p:txBody>
+          <a:bodyPr wrap="square" rtlCol="0" anchor="ctr"/>
+          <a:lstStyle/>
+          <a:p>
+            <a:pPr indent="0" marL="0">
+              <a:buNone/>
+            </a:pPr>
+            <a:r>
+              <a:rPr lang="en-US" sz="1000" dirty="0">
+                <a:solidFill>
+                  <a:srgbClr val="9AA0AC"/>
+                </a:solidFill>
+              </a:rPr>
+              <a:t>Proof, live in 90 days</a:t>
+            </a:r>
+            <a:endParaRPr lang="en-US" sz="1000" dirty="0"/>
+          </a:p>
+        </p:txBody>
+      </p:sp>
+      <p:sp>
+        <p:nvSpPr>
+          <p:cNvPr id="9" name="Shape 7"/>
+          <p:cNvSpPr/>
+          <p:nvPr/>
+        </p:nvSpPr>
+        <p:spPr>
+          <a:xfrm>
+            <a:off x="548640" y="2194560"/>
+            <a:ext cx="8046720" cy="621792"/>
+          </a:xfrm>
+          <a:prstGeom prst="roundRect">
+            <a:avLst>
+              <a:gd name="adj" fmla="val 10294"/>
+            </a:avLst>
+          </a:prstGeom>
+          <a:solidFill>
+            <a:srgbClr val="1B2030"/>
+          </a:solidFill>
+          <a:ln w="6350">
+            <a:solidFill>
+              <a:srgbClr val="4FCEE4"/>
+            </a:solidFill>
+            <a:prstDash val="solid"/>
+          </a:ln>
+        </p:spPr>
+      </p:sp>
+      <p:sp>
+        <p:nvSpPr>
+          <p:cNvPr id="10" name="Text 8"/>
+          <p:cNvSpPr/>
+          <p:nvPr/>
+        </p:nvSpPr>
+        <p:spPr>
+          <a:xfrm>
+            <a:off x="731520" y="2286000"/>
+            <a:ext cx="1645920" cy="411480"/>
+          </a:xfrm>
+          <a:prstGeom prst="rect">
+            <a:avLst/>
+          </a:prstGeom>
+          <a:noFill/>
+          <a:ln/>
+        </p:spPr>
+        <p:txBody>
+          <a:bodyPr wrap="square" rtlCol="0" anchor="ctr"/>
+          <a:lstStyle/>
+          <a:p>
+            <a:pPr indent="0" marL="0">
+              <a:buNone/>
+            </a:pPr>
+            <a:r>
+              <a:rPr lang="en-US" sz="1300" b="1" dirty="0">
+                <a:solidFill>
+                  <a:srgbClr val="D9F24B"/>
+                </a:solidFill>
+              </a:rPr>
+              <a:t>Regional</a:t>
+            </a:r>
+            <a:endParaRPr lang="en-US" sz="1300" dirty="0"/>
+          </a:p>
+        </p:txBody>
+      </p:sp>
+      <p:sp>
+        <p:nvSpPr>
+          <p:cNvPr id="11" name="Text 9"/>
+          <p:cNvSpPr/>
+          <p:nvPr/>
+        </p:nvSpPr>
+        <p:spPr>
+          <a:xfrm>
+            <a:off x="2377440" y="2286000"/>
+            <a:ext cx="3108960" cy="411480"/>
+          </a:xfrm>
+          <a:prstGeom prst="rect">
+            <a:avLst/>
+          </a:prstGeom>
+          <a:noFill/>
+          <a:ln/>
+        </p:spPr>
+        <p:txBody>
+          <a:bodyPr wrap="square" rtlCol="0" anchor="ctr"/>
+          <a:lstStyle/>
+          <a:p>
+            <a:pPr indent="0" marL="0">
+              <a:buNone/>
+            </a:pPr>
+            <a:r>
+              <a:rPr lang="en-US" sz="1050" dirty="0">
+                <a:solidFill>
+                  <a:srgbClr val="FFFFFF"/>
+                </a:solidFill>
+              </a:rPr>
+              <a:t>ICS cluster — identity + consent ledger + data adapter</a:t>
+            </a:r>
+            <a:endParaRPr lang="en-US" sz="1050" dirty="0"/>
+          </a:p>
+        </p:txBody>
+      </p:sp>
+      <p:sp>
+        <p:nvSpPr>
+          <p:cNvPr id="12" name="Text 10"/>
+          <p:cNvSpPr/>
+          <p:nvPr/>
+        </p:nvSpPr>
+        <p:spPr>
+          <a:xfrm>
+            <a:off x="5577840" y="2286000"/>
+            <a:ext cx="1554480" cy="411480"/>
+          </a:xfrm>
+          <a:prstGeom prst="rect">
+            <a:avLst/>
+          </a:prstGeom>
+          <a:noFill/>
+          <a:ln/>
+        </p:spPr>
+        <p:txBody>
+          <a:bodyPr wrap="square" rtlCol="0" anchor="ctr"/>
+          <a:lstStyle/>
+          <a:p>
+            <a:pPr indent="0" marL="0">
+              <a:buNone/>
+            </a:pPr>
+            <a:r>
+              <a:rPr lang="en-US" sz="1150" b="1" dirty="0">
+                <a:solidFill>
+                  <a:srgbClr val="4FCEE4"/>
+                </a:solidFill>
+              </a:rPr>
+              <a:t>£8M / yr</a:t>
+            </a:r>
+            <a:endParaRPr lang="en-US" sz="1150" dirty="0"/>
+          </a:p>
+        </p:txBody>
+      </p:sp>
+      <p:sp>
+        <p:nvSpPr>
+          <p:cNvPr id="13" name="Text 11"/>
+          <p:cNvSpPr/>
+          <p:nvPr/>
+        </p:nvSpPr>
+        <p:spPr>
+          <a:xfrm>
+            <a:off x="7223760" y="2286000"/>
+            <a:ext cx="1371600" cy="411480"/>
+          </a:xfrm>
+          <a:prstGeom prst="rect">
+            <a:avLst/>
+          </a:prstGeom>
+          <a:noFill/>
+          <a:ln/>
+        </p:spPr>
+        <p:txBody>
+          <a:bodyPr wrap="square" rtlCol="0" anchor="ctr"/>
+          <a:lstStyle/>
+          <a:p>
+            <a:pPr indent="0" marL="0">
+              <a:buNone/>
+            </a:pPr>
+            <a:r>
+              <a:rPr lang="en-US" sz="1000" dirty="0">
+                <a:solidFill>
+                  <a:srgbClr val="9AA0AC"/>
+                </a:solidFill>
+              </a:rPr>
+              <a:t>Scaled evidence</a:t>
+            </a:r>
+            <a:endParaRPr lang="en-US" sz="1000" dirty="0"/>
+          </a:p>
+        </p:txBody>
+      </p:sp>
+      <p:sp>
+        <p:nvSpPr>
+          <p:cNvPr id="14" name="Shape 12"/>
+          <p:cNvSpPr/>
+          <p:nvPr/>
+        </p:nvSpPr>
+        <p:spPr>
+          <a:xfrm>
+            <a:off x="548640" y="2926080"/>
+            <a:ext cx="8046720" cy="621792"/>
+          </a:xfrm>
+          <a:prstGeom prst="roundRect">
+            <a:avLst>
+              <a:gd name="adj" fmla="val 10294"/>
+            </a:avLst>
+          </a:prstGeom>
+          <a:solidFill>
+            <a:srgbClr val="1B2030"/>
+          </a:solidFill>
+          <a:ln w="6350">
+            <a:solidFill>
+              <a:srgbClr val="4FCEE4"/>
+            </a:solidFill>
+            <a:prstDash val="solid"/>
+          </a:ln>
+        </p:spPr>
+      </p:sp>
+      <p:sp>
+        <p:nvSpPr>
+          <p:cNvPr id="15" name="Text 13"/>
+          <p:cNvSpPr/>
+          <p:nvPr/>
+        </p:nvSpPr>
+        <p:spPr>
+          <a:xfrm>
+            <a:off x="731520" y="3017520"/>
+            <a:ext cx="1645920" cy="411480"/>
+          </a:xfrm>
+          <a:prstGeom prst="rect">
+            <a:avLst/>
+          </a:prstGeom>
+          <a:noFill/>
+          <a:ln/>
+        </p:spPr>
+        <p:txBody>
+          <a:bodyPr wrap="square" rtlCol="0" anchor="ctr"/>
+          <a:lstStyle/>
+          <a:p>
+            <a:pPr indent="0" marL="0">
+              <a:buNone/>
+            </a:pPr>
+            <a:r>
+              <a:rPr lang="en-US" sz="1300" b="1" dirty="0">
+                <a:solidFill>
+                  <a:srgbClr val="D9F24B"/>
+                </a:solidFill>
+              </a:rPr>
+              <a:t>National 50M</a:t>
+            </a:r>
+            <a:endParaRPr lang="en-US" sz="1300" dirty="0"/>
+          </a:p>
+        </p:txBody>
+      </p:sp>
+      <p:sp>
+        <p:nvSpPr>
+          <p:cNvPr id="16" name="Text 14"/>
+          <p:cNvSpPr/>
+          <p:nvPr/>
+        </p:nvSpPr>
+        <p:spPr>
+          <a:xfrm>
+            <a:off x="2377440" y="3017520"/>
+            <a:ext cx="3108960" cy="411480"/>
+          </a:xfrm>
+          <a:prstGeom prst="rect">
+            <a:avLst/>
+          </a:prstGeom>
+          <a:noFill/>
+          <a:ln/>
+        </p:spPr>
+        <p:txBody>
+          <a:bodyPr wrap="square" rtlCol="0" anchor="ctr"/>
+          <a:lstStyle/>
+          <a:p>
+            <a:pPr indent="0" marL="0">
+              <a:buNone/>
+            </a:pPr>
+            <a:r>
+              <a:rPr lang="en-US" sz="1050" dirty="0">
+                <a:solidFill>
+                  <a:srgbClr val="FFFFFF"/>
+                </a:solidFill>
+              </a:rPr>
+              <a:t>NHS England full rollout — cards + ZEUS DOC + AEGIS + registries</a:t>
+            </a:r>
+            <a:endParaRPr lang="en-US" sz="1050" dirty="0"/>
+          </a:p>
+        </p:txBody>
+      </p:sp>
+      <p:sp>
+        <p:nvSpPr>
+          <p:cNvPr id="17" name="Text 15"/>
+          <p:cNvSpPr/>
+          <p:nvPr/>
+        </p:nvSpPr>
+        <p:spPr>
+          <a:xfrm>
+            <a:off x="5577840" y="3017520"/>
+            <a:ext cx="1554480" cy="411480"/>
+          </a:xfrm>
+          <a:prstGeom prst="rect">
+            <a:avLst/>
+          </a:prstGeom>
+          <a:noFill/>
+          <a:ln/>
+        </p:spPr>
+        <p:txBody>
+          <a:bodyPr wrap="square" rtlCol="0" anchor="ctr"/>
+          <a:lstStyle/>
+          <a:p>
+            <a:pPr indent="0" marL="0">
+              <a:buNone/>
+            </a:pPr>
+            <a:r>
+              <a:rPr lang="en-US" sz="1150" b="1" dirty="0">
+                <a:solidFill>
+                  <a:srgbClr val="4FCEE4"/>
+                </a:solidFill>
+              </a:rPr>
+              <a:t>£86M / yr (10yr £865M)</a:t>
+            </a:r>
+            <a:endParaRPr lang="en-US" sz="1150" dirty="0"/>
+          </a:p>
+        </p:txBody>
+      </p:sp>
+      <p:sp>
+        <p:nvSpPr>
+          <p:cNvPr id="18" name="Text 16"/>
+          <p:cNvSpPr/>
+          <p:nvPr/>
+        </p:nvSpPr>
+        <p:spPr>
+          <a:xfrm>
+            <a:off x="7223760" y="3017520"/>
+            <a:ext cx="1371600" cy="411480"/>
+          </a:xfrm>
+          <a:prstGeom prst="rect">
+            <a:avLst/>
+          </a:prstGeom>
+          <a:noFill/>
+          <a:ln/>
+        </p:spPr>
+        <p:txBody>
+          <a:bodyPr wrap="square" rtlCol="0" anchor="ctr"/>
+          <a:lstStyle/>
+          <a:p>
+            <a:pPr indent="0" marL="0">
+              <a:buNone/>
+            </a:pPr>
+            <a:r>
+              <a:rPr lang="en-US" sz="1000" dirty="0">
+                <a:solidFill>
+                  <a:srgbClr val="9AA0AC"/>
+                </a:solidFill>
+              </a:rPr>
+              <a:t>£24.4B · 28.2x ROI</a:t>
+            </a:r>
+            <a:endParaRPr lang="en-US" sz="1000" dirty="0"/>
+          </a:p>
+        </p:txBody>
+      </p:sp>
+      <p:sp>
+        <p:nvSpPr>
+          <p:cNvPr id="19" name="Shape 17"/>
+          <p:cNvSpPr/>
+          <p:nvPr/>
+        </p:nvSpPr>
+        <p:spPr>
+          <a:xfrm>
+            <a:off x="548640" y="3657600"/>
+            <a:ext cx="8046720" cy="621792"/>
+          </a:xfrm>
+          <a:prstGeom prst="roundRect">
+            <a:avLst>
+              <a:gd name="adj" fmla="val 10294"/>
+            </a:avLst>
+          </a:prstGeom>
+          <a:solidFill>
+            <a:srgbClr val="1B2030"/>
+          </a:solidFill>
+          <a:ln w="6350">
+            <a:solidFill>
+              <a:srgbClr val="4FCEE4"/>
+            </a:solidFill>
+            <a:prstDash val="solid"/>
+          </a:ln>
+        </p:spPr>
+      </p:sp>
+      <p:sp>
+        <p:nvSpPr>
+          <p:cNvPr id="20" name="Text 18"/>
+          <p:cNvSpPr/>
+          <p:nvPr/>
+        </p:nvSpPr>
+        <p:spPr>
+          <a:xfrm>
+            <a:off x="731520" y="3749040"/>
+            <a:ext cx="1645920" cy="411480"/>
+          </a:xfrm>
+          <a:prstGeom prst="rect">
+            <a:avLst/>
+          </a:prstGeom>
+          <a:noFill/>
+          <a:ln/>
+        </p:spPr>
+        <p:txBody>
+          <a:bodyPr wrap="square" rtlCol="0" anchor="ctr"/>
+          <a:lstStyle/>
+          <a:p>
+            <a:pPr indent="0" marL="0">
+              <a:buNone/>
+            </a:pPr>
+            <a:r>
+              <a:rPr lang="en-US" sz="1300" b="1" dirty="0">
+                <a:solidFill>
+                  <a:srgbClr val="D9F24B"/>
+                </a:solidFill>
+              </a:rPr>
+              <a:t>White-label</a:t>
+            </a:r>
+            <a:endParaRPr lang="en-US" sz="1300" dirty="0"/>
+          </a:p>
+        </p:txBody>
+      </p:sp>
+      <p:sp>
+        <p:nvSpPr>
+          <p:cNvPr id="21" name="Text 19"/>
+          <p:cNvSpPr/>
+          <p:nvPr/>
+        </p:nvSpPr>
+        <p:spPr>
+          <a:xfrm>
+            <a:off x="2377440" y="3749040"/>
+            <a:ext cx="3108960" cy="411480"/>
+          </a:xfrm>
+          <a:prstGeom prst="rect">
+            <a:avLst/>
+          </a:prstGeom>
+          <a:noFill/>
+          <a:ln/>
+        </p:spPr>
+        <p:txBody>
+          <a:bodyPr wrap="square" rtlCol="0" anchor="ctr"/>
+          <a:lstStyle/>
+          <a:p>
+            <a:pPr indent="0" marL="0">
+              <a:buNone/>
+            </a:pPr>
+            <a:r>
+              <a:rPr lang="en-US" sz="1050" dirty="0">
+                <a:solidFill>
+                  <a:srgbClr val="FFFFFF"/>
+                </a:solidFill>
+              </a:rPr>
+              <a:t>Licence / export — other public sectors, international</a:t>
+            </a:r>
+            <a:endParaRPr lang="en-US" sz="1050" dirty="0"/>
+          </a:p>
+        </p:txBody>
+      </p:sp>
+      <p:sp>
+        <p:nvSpPr>
+          <p:cNvPr id="22" name="Text 20"/>
+          <p:cNvSpPr/>
+          <p:nvPr/>
+        </p:nvSpPr>
+        <p:spPr>
+          <a:xfrm>
+            <a:off x="5577840" y="3749040"/>
+            <a:ext cx="1554480" cy="411480"/>
+          </a:xfrm>
+          <a:prstGeom prst="rect">
+            <a:avLst/>
+          </a:prstGeom>
+          <a:noFill/>
+          <a:ln/>
+        </p:spPr>
+        <p:txBody>
+          <a:bodyPr wrap="square" rtlCol="0" anchor="ctr"/>
+          <a:lstStyle/>
+          <a:p>
+            <a:pPr indent="0" marL="0">
+              <a:buNone/>
+            </a:pPr>
+            <a:r>
+              <a:rPr lang="en-US" sz="1150" b="1" dirty="0">
+                <a:solidFill>
+                  <a:srgbClr val="4FCEE4"/>
+                </a:solidFill>
+              </a:rPr>
+              <a:t>Bespoke</a:t>
+            </a:r>
+            <a:endParaRPr lang="en-US" sz="1150" dirty="0"/>
+          </a:p>
+        </p:txBody>
+      </p:sp>
+      <p:sp>
+        <p:nvSpPr>
+          <p:cNvPr id="23" name="Text 21"/>
+          <p:cNvSpPr/>
+          <p:nvPr/>
+        </p:nvSpPr>
+        <p:spPr>
+          <a:xfrm>
+            <a:off x="7223760" y="3749040"/>
+            <a:ext cx="1371600" cy="411480"/>
+          </a:xfrm>
+          <a:prstGeom prst="rect">
+            <a:avLst/>
+          </a:prstGeom>
+          <a:noFill/>
+          <a:ln/>
+        </p:spPr>
+        <p:txBody>
+          <a:bodyPr wrap="square" rtlCol="0" anchor="ctr"/>
+          <a:lstStyle/>
+          <a:p>
+            <a:pPr indent="0" marL="0">
+              <a:buNone/>
+            </a:pPr>
+            <a:r>
+              <a:rPr lang="en-US" sz="1000" dirty="0">
+                <a:solidFill>
+                  <a:srgbClr val="9AA0AC"/>
+                </a:solidFill>
+              </a:rPr>
+              <a:t>Recurring licence</a:t>
+            </a:r>
+            <a:endParaRPr lang="en-US" sz="1000" dirty="0"/>
+          </a:p>
+        </p:txBody>
+      </p:sp>
+      <p:sp>
+        <p:nvSpPr>
+          <p:cNvPr id="24" name="Text 22"/>
+          <p:cNvSpPr/>
+          <p:nvPr/>
+        </p:nvSpPr>
+        <p:spPr>
+          <a:xfrm>
+            <a:off x="548640" y="4526280"/>
+            <a:ext cx="8046720" cy="365760"/>
+          </a:xfrm>
+          <a:prstGeom prst="rect">
+            <a:avLst/>
+          </a:prstGeom>
+          <a:noFill/>
+          <a:ln/>
+        </p:spPr>
+        <p:txBody>
+          <a:bodyPr wrap="square" rtlCol="0" anchor="ctr"/>
+          <a:lstStyle/>
+          <a:p>
+            <a:pPr indent="0" marL="0">
+              <a:buNone/>
+            </a:pPr>
+            <a:r>
+              <a:rPr lang="en-US" sz="1250" b="1" dirty="0">
+                <a:solidFill>
+                  <a:srgbClr val="D9F24B"/>
+                </a:solidFill>
+              </a:rPr>
+              <a:t>Break-even at each tier covered by efficiency gains: signatures, consent automation, fraud reduction.</a:t>
+            </a:r>
+            <a:endParaRPr lang="en-US" sz="1250" dirty="0"/>
+          </a:p>
+        </p:txBody>
+      </p:sp>
+      <p:sp>
+        <p:nvSpPr>
+          <p:cNvPr id="25" name="Text 23"/>
+          <p:cNvSpPr/>
+          <p:nvPr/>
+        </p:nvSpPr>
+        <p:spPr>
+          <a:xfrm>
+            <a:off x="365760" y="4864608"/>
+            <a:ext cx="7315200" cy="274320"/>
+          </a:xfrm>
+          <a:prstGeom prst="rect">
+            <a:avLst/>
+          </a:prstGeom>
+          <a:noFill/>
+          <a:ln/>
+        </p:spPr>
+        <p:txBody>
+          <a:bodyPr wrap="square" rtlCol="0" anchor="ctr"/>
+          <a:lstStyle/>
+          <a:p>
+            <a:pPr indent="0" marL="0">
+              <a:buNone/>
+            </a:pPr>
+            <a:r>
+              <a:rPr lang="en-US" sz="800" dirty="0">
+                <a:solidFill>
+                  <a:srgbClr val="9AA0AC"/>
+                </a:solidFill>
+              </a:rPr>
+              <a:t>ZEUSTA · ZEUS DOC · AEGIS — All IP belongs to JDB Sales</a:t>
+            </a:r>
+            <a:endParaRPr lang="en-US" sz="800" dirty="0"/>
+          </a:p>
+        </p:txBody>
+      </p:sp>
+      <p:sp>
+        <p:nvSpPr>
+          <p:cNvPr id="26" name="Text 24"/>
+          <p:cNvSpPr/>
+          <p:nvPr/>
+        </p:nvSpPr>
+        <p:spPr>
+          <a:xfrm>
+            <a:off x="8503920" y="4864608"/>
+            <a:ext cx="365760" cy="274320"/>
+          </a:xfrm>
+          <a:prstGeom prst="rect">
+            <a:avLst/>
+          </a:prstGeom>
+          <a:noFill/>
+          <a:ln/>
+        </p:spPr>
+        <p:txBody>
+          <a:bodyPr wrap="square" rtlCol="0" anchor="ctr"/>
+          <a:lstStyle/>
+          <a:p>
+            <a:pPr algn="r" indent="0" marL="0">
+              <a:buNone/>
+            </a:pPr>
+            <a:r>
+              <a:rPr lang="en-US" sz="800" dirty="0">
+                <a:solidFill>
+                  <a:srgbClr val="9AA0AC"/>
+                </a:solidFill>
+              </a:rPr>
+              <a:t>7</a:t>
+            </a:r>
+            <a:endParaRPr lang="en-US" sz="800" dirty="0"/>
+          </a:p>
+        </p:txBody>
+      </p:sp>
+    </p:spTree>
+  </p:cSld>
+  <p:clrMapOvr>
+    <a:masterClrMapping/>
+  </p:clrMapOvr>
+</p:sld>
+</file>
+
+<file path=ppt/slides/slide8.xml><?xml version="1.0" encoding="utf-8"?>
+<p:sld xmlns:a="http://schemas.openxmlformats.org/drawingml/2006/main" xmlns:r="http://schemas.openxmlformats.org/officeDocument/2006/relationships" xmlns:p="http://schemas.openxmlformats.org/presentationml/2006/main">
+  <p:cSld name="Slide 8">
+    <p:bg>
+      <p:bgPr>
+        <a:solidFill>
+          <a:srgbClr val="10131B"/>
+        </a:solidFill>
+      </p:bgPr>
+    </p:bg>
+    <p:spTree>
+      <p:nvGrpSpPr>
+        <p:cNvPr id="1" name=""/>
+        <p:cNvGrpSpPr/>
+        <p:nvPr/>
+      </p:nvGrpSpPr>
+      <p:grpSpPr>
+        <a:xfrm>
+          <a:off x="0" y="0"/>
+          <a:ext cx="0" cy="0"/>
+          <a:chOff x="0" y="0"/>
+          <a:chExt cx="0" cy="0"/>
+        </a:xfrm>
+      </p:grpSpPr>
+      <p:sp>
+        <p:nvSpPr>
+          <p:cNvPr id="2" name="Text 0"/>
+          <p:cNvSpPr/>
+          <p:nvPr/>
+        </p:nvSpPr>
+        <p:spPr>
+          <a:xfrm>
+            <a:off x="548640" y="411480"/>
+            <a:ext cx="8046720" cy="457200"/>
+          </a:xfrm>
+          <a:prstGeom prst="rect">
+            <a:avLst/>
+          </a:prstGeom>
+          <a:noFill/>
+          <a:ln/>
+        </p:spPr>
+        <p:txBody>
+          <a:bodyPr wrap="square" rtlCol="0" anchor="ctr"/>
+          <a:lstStyle/>
+          <a:p>
+            <a:pPr indent="0" marL="0">
+              <a:buNone/>
+            </a:pPr>
+            <a:r>
+              <a:rPr lang="en-US" sz="2200" b="1" dirty="0">
+                <a:solidFill>
+                  <a:srgbClr val="4FCEE4"/>
+                </a:solidFill>
+              </a:rPr>
               <a:t>COMMERCIAL &amp; NEXT STEPS</a:t>
             </a:r>
             <a:endParaRPr lang="en-US" sz="2200" dirty="0"/>
@@ -5638,7 +6623,7 @@
                   <a:srgbClr val="9AA0AC"/>
                 </a:solidFill>
               </a:rPr>
-              <a:t>7</a:t>
+              <a:t>8</a:t>
             </a:r>
             <a:endParaRPr lang="en-US" sz="800" dirty="0"/>
           </a:p>

--- a/docs/security/zeus-doc/docs/NHS-Bid-Pitch-Deck-ZEUSTA.pptx
+++ b/docs/security/zeus-doc/docs/NHS-Bid-Pitch-Deck-ZEUSTA.pptx
@@ -13,9 +13,10 @@
     <p:sldId id="261" r:id="rId7"/>
     <p:sldId id="262" r:id="rId8"/>
     <p:sldId id="263" r:id="rId9"/>
+    <p:sldId id="264" r:id="rId10"/>
   </p:sldIdLst>
   <p:notesMasterIdLst>
-    <p:notesMasterId r:id="rId10"/>
+    <p:notesMasterId r:id="rId11"/>
   </p:notesMasterIdLst>
   <p:sldSz cx="9144000" cy="5143500"/>
   <p:notesSz cx="5143500" cy="9144000"/>
@@ -1149,6 +1150,94 @@
             <a:fld id="{F7021451-1387-4CA6-816F-3879F97B5CBC}" type="slidenum">
               <a:rPr lang="en-US"/>
               <a:t>8</a:t>
+            </a:fld>
+            <a:endParaRPr lang="en-US"/>
+          </a:p>
+        </p:txBody>
+      </p:sp>
+    </p:spTree>
+    <p:extLst>
+      <p:ext uri="{BB962C8B-B14F-4D97-AF65-F5344CB8AC3E}">
+        <p14:creationId xmlns:p14="http://schemas.microsoft.com/office/powerpoint/2010/main" val="1024086991"/>
+      </p:ext>
+    </p:extLst>
+  </p:cSld>
+  <p:clrMapOvr>
+    <a:masterClrMapping/>
+  </p:clrMapOvr>
+</p:notes>
+</file>
+
+<file path=ppt/notesSlides/notesSlide9.xml><?xml version="1.0" encoding="utf-8"?>
+<p:notes xmlns:a="http://schemas.openxmlformats.org/drawingml/2006/main" xmlns:r="http://schemas.openxmlformats.org/officeDocument/2006/relationships" xmlns:p="http://schemas.openxmlformats.org/presentationml/2006/main">
+  <p:cSld>
+    <p:spTree>
+      <p:nvGrpSpPr>
+        <p:cNvPr id="1" name=""/>
+        <p:cNvGrpSpPr/>
+        <p:nvPr/>
+      </p:nvGrpSpPr>
+      <p:grpSpPr>
+        <a:xfrm>
+          <a:off x="0" y="0"/>
+          <a:ext cx="0" cy="0"/>
+          <a:chOff x="0" y="0"/>
+          <a:chExt cx="0" cy="0"/>
+        </a:xfrm>
+      </p:grpSpPr>
+      <p:sp>
+        <p:nvSpPr>
+          <p:cNvPr id="2" name="Slide Image Placeholder 1"/>
+          <p:cNvSpPr>
+            <a:spLocks noGrp="1" noRot="1" noChangeAspect="1"/>
+          </p:cNvSpPr>
+          <p:nvPr>
+            <p:ph type="sldImg"/>
+          </p:nvPr>
+        </p:nvSpPr>
+        <p:spPr/>
+      </p:sp>
+      <p:sp>
+        <p:nvSpPr>
+          <p:cNvPr id="3" name="Notes Placeholder 2"/>
+          <p:cNvSpPr>
+            <a:spLocks noGrp="1"/>
+          </p:cNvSpPr>
+          <p:nvPr>
+            <p:ph type="body" idx="1"/>
+          </p:nvPr>
+        </p:nvSpPr>
+        <p:spPr/>
+        <p:txBody>
+          <a:bodyPr/>
+          <a:lstStyle/>
+          <a:p>
+            <a:r>
+              <a:rPr lang="en-US" dirty="0"/>
+              <a:t/>
+            </a:r>
+            <a:endParaRPr lang="en-US" dirty="0"/>
+          </a:p>
+        </p:txBody>
+      </p:sp>
+      <p:sp>
+        <p:nvSpPr>
+          <p:cNvPr id="4" name="Slide Number Placeholder 3"/>
+          <p:cNvSpPr>
+            <a:spLocks noGrp="1"/>
+          </p:cNvSpPr>
+          <p:nvPr>
+            <p:ph type="sldNum" sz="quarter" idx="10"/>
+          </p:nvPr>
+        </p:nvSpPr>
+        <p:spPr/>
+        <p:txBody>
+          <a:bodyPr/>
+          <a:lstStyle/>
+          <a:p>
+            <a:fld id="{F7021451-1387-4CA6-816F-3879F97B5CBC}" type="slidenum">
+              <a:rPr lang="en-US"/>
+              <a:t>9</a:t>
             </a:fld>
             <a:endParaRPr lang="en-US"/>
           </a:p>
@@ -5275,7 +5364,7 @@
                   <a:srgbClr val="4FCEE4"/>
                 </a:solidFill>
               </a:rPr>
-              <a:t>COMMERCIAL MODEL — TIERS</a:t>
+              <a:t>ESTONIA PROOF — 99% · 100% · 2% GDP</a:t>
             </a:r>
             <a:endParaRPr lang="en-US" sz="2200" dirty="0"/>
           </a:p>
@@ -5311,7 +5400,7 @@
                   <a:srgbClr val="9AA0AC"/>
                 </a:solidFill>
               </a:rPr>
-              <a:t>Anchored to the programme business case: £24.4B value · 28.2x ROI · 10yr NHS England. Indicative, negotiable.</a:t>
+              <a:t>A whole-state digital model, proven at national scale — the numbers NHS boards will remember.</a:t>
             </a:r>
             <a:endParaRPr lang="en-US" sz="1300" dirty="0"/>
           </a:p>
@@ -5325,12 +5414,12 @@
         </p:nvSpPr>
         <p:spPr>
           <a:xfrm>
-            <a:off x="548640" y="1463040"/>
-            <a:ext cx="8046720" cy="621792"/>
+            <a:off x="548640" y="1417320"/>
+            <a:ext cx="8046720" cy="548640"/>
           </a:xfrm>
           <a:prstGeom prst="roundRect">
             <a:avLst>
-              <a:gd name="adj" fmla="val 10294"/>
+              <a:gd name="adj" fmla="val 11667"/>
             </a:avLst>
           </a:prstGeom>
           <a:solidFill>
@@ -5338,7 +5427,7 @@
           </a:solidFill>
           <a:ln w="6350">
             <a:solidFill>
-              <a:srgbClr val="4FCEE4"/>
+              <a:srgbClr val="D9F24B"/>
             </a:solidFill>
             <a:prstDash val="solid"/>
           </a:ln>
@@ -5352,31 +5441,31 @@
         </p:nvSpPr>
         <p:spPr>
           <a:xfrm>
-            <a:off x="731520" y="1554480"/>
-            <a:ext cx="1645920" cy="411480"/>
-          </a:xfrm>
-          <a:prstGeom prst="rect">
-            <a:avLst/>
-          </a:prstGeom>
-          <a:noFill/>
-          <a:ln/>
-        </p:spPr>
-        <p:txBody>
-          <a:bodyPr wrap="square" rtlCol="0" anchor="ctr"/>
-          <a:lstStyle/>
-          <a:p>
-            <a:pPr indent="0" marL="0">
-              <a:buNone/>
-            </a:pPr>
-            <a:r>
-              <a:rPr lang="en-US" sz="1300" b="1" dirty="0">
+            <a:off x="777240" y="1481328"/>
+            <a:ext cx="4023360" cy="411480"/>
+          </a:xfrm>
+          <a:prstGeom prst="rect">
+            <a:avLst/>
+          </a:prstGeom>
+          <a:noFill/>
+          <a:ln/>
+        </p:spPr>
+        <p:txBody>
+          <a:bodyPr wrap="square" rtlCol="0" anchor="ctr"/>
+          <a:lstStyle/>
+          <a:p>
+            <a:pPr indent="0" marL="0">
+              <a:buNone/>
+            </a:pPr>
+            <a:r>
+              <a:rPr lang="en-US" sz="1250" b="1" dirty="0">
                 <a:solidFill>
                   <a:srgbClr val="D9F24B"/>
                 </a:solidFill>
               </a:rPr>
-              <a:t>Pilot</a:t>
-            </a:r>
-            <a:endParaRPr lang="en-US" sz="1300" dirty="0"/>
+              <a:t>★ 99% of citizens hold an e-ID card</a:t>
+            </a:r>
+            <a:endParaRPr lang="en-US" sz="1250" dirty="0"/>
           </a:p>
         </p:txBody>
       </p:sp>
@@ -5388,120 +5477,48 @@
         </p:nvSpPr>
         <p:spPr>
           <a:xfrm>
-            <a:off x="2377440" y="1554480"/>
-            <a:ext cx="3108960" cy="411480"/>
-          </a:xfrm>
-          <a:prstGeom prst="rect">
-            <a:avLst/>
-          </a:prstGeom>
-          <a:noFill/>
-          <a:ln/>
-        </p:spPr>
-        <p:txBody>
-          <a:bodyPr wrap="square" rtlCol="0" anchor="ctr"/>
-          <a:lstStyle/>
-          <a:p>
-            <a:pPr indent="0" marL="0">
-              <a:buNone/>
-            </a:pPr>
-            <a:r>
-              <a:rPr lang="en-US" sz="1050" dirty="0">
+            <a:off x="4937760" y="1481328"/>
+            <a:ext cx="3566160" cy="411480"/>
+          </a:xfrm>
+          <a:prstGeom prst="rect">
+            <a:avLst/>
+          </a:prstGeom>
+          <a:noFill/>
+          <a:ln/>
+        </p:spPr>
+        <p:txBody>
+          <a:bodyPr wrap="square" rtlCol="0" anchor="ctr"/>
+          <a:lstStyle/>
+          <a:p>
+            <a:pPr indent="0" marL="0">
+              <a:buNone/>
+            </a:pPr>
+            <a:r>
+              <a:rPr lang="en-US" sz="1100" dirty="0">
                 <a:solidFill>
                   <a:srgbClr val="FFFFFF"/>
                 </a:solidFill>
               </a:rPr>
-              <a:t>One ICB / trust region — ZEUS DOC + AEGIS + 100k cards</a:t>
-            </a:r>
-            <a:endParaRPr lang="en-US" sz="1050" dirty="0"/>
-          </a:p>
-        </p:txBody>
-      </p:sp>
-      <p:sp>
-        <p:nvSpPr>
-          <p:cNvPr id="7" name="Text 5"/>
-          <p:cNvSpPr/>
-          <p:nvPr/>
-        </p:nvSpPr>
-        <p:spPr>
-          <a:xfrm>
-            <a:off x="5577840" y="1554480"/>
-            <a:ext cx="1554480" cy="411480"/>
-          </a:xfrm>
-          <a:prstGeom prst="rect">
-            <a:avLst/>
-          </a:prstGeom>
-          <a:noFill/>
-          <a:ln/>
-        </p:spPr>
-        <p:txBody>
-          <a:bodyPr wrap="square" rtlCol="0" anchor="ctr"/>
-          <a:lstStyle/>
-          <a:p>
-            <a:pPr indent="0" marL="0">
-              <a:buNone/>
-            </a:pPr>
-            <a:r>
-              <a:rPr lang="en-US" sz="1150" b="1" dirty="0">
-                <a:solidFill>
-                  <a:srgbClr val="4FCEE4"/>
-                </a:solidFill>
-              </a:rPr>
-              <a:t>£1.0M / yr</a:t>
-            </a:r>
-            <a:endParaRPr lang="en-US" sz="1150" dirty="0"/>
-          </a:p>
-        </p:txBody>
-      </p:sp>
-      <p:sp>
-        <p:nvSpPr>
-          <p:cNvPr id="8" name="Text 6"/>
-          <p:cNvSpPr/>
-          <p:nvPr/>
-        </p:nvSpPr>
-        <p:spPr>
-          <a:xfrm>
-            <a:off x="7223760" y="1554480"/>
-            <a:ext cx="1371600" cy="411480"/>
-          </a:xfrm>
-          <a:prstGeom prst="rect">
-            <a:avLst/>
-          </a:prstGeom>
-          <a:noFill/>
-          <a:ln/>
-        </p:spPr>
-        <p:txBody>
-          <a:bodyPr wrap="square" rtlCol="0" anchor="ctr"/>
-          <a:lstStyle/>
-          <a:p>
-            <a:pPr indent="0" marL="0">
-              <a:buNone/>
-            </a:pPr>
-            <a:r>
-              <a:rPr lang="en-US" sz="1000" dirty="0">
-                <a:solidFill>
-                  <a:srgbClr val="9AA0AC"/>
-                </a:solidFill>
-              </a:rPr>
-              <a:t>Proof, live in 90 days</a:t>
-            </a:r>
-            <a:endParaRPr lang="en-US" sz="1000" dirty="0"/>
-          </a:p>
-        </p:txBody>
-      </p:sp>
-      <p:sp>
-        <p:nvSpPr>
-          <p:cNvPr id="9" name="Shape 7"/>
-          <p:cNvSpPr/>
-          <p:nvPr/>
-        </p:nvSpPr>
-        <p:spPr>
-          <a:xfrm>
-            <a:off x="548640" y="2194560"/>
-            <a:ext cx="8046720" cy="621792"/>
+              <a:t>Ubiquitous identity is achievable at national scale</a:t>
+            </a:r>
+            <a:endParaRPr lang="en-US" sz="1100" dirty="0"/>
+          </a:p>
+        </p:txBody>
+      </p:sp>
+      <p:sp>
+        <p:nvSpPr>
+          <p:cNvPr id="7" name="Shape 5"/>
+          <p:cNvSpPr/>
+          <p:nvPr/>
+        </p:nvSpPr>
+        <p:spPr>
+          <a:xfrm>
+            <a:off x="548640" y="2075688"/>
+            <a:ext cx="8046720" cy="548640"/>
           </a:xfrm>
           <a:prstGeom prst="roundRect">
             <a:avLst>
-              <a:gd name="adj" fmla="val 10294"/>
+              <a:gd name="adj" fmla="val 11667"/>
             </a:avLst>
           </a:prstGeom>
           <a:solidFill>
@@ -5509,7 +5526,7 @@
           </a:solidFill>
           <a:ln w="6350">
             <a:solidFill>
-              <a:srgbClr val="4FCEE4"/>
+              <a:srgbClr val="D9F24B"/>
             </a:solidFill>
             <a:prstDash val="solid"/>
           </a:ln>
@@ -5517,162 +5534,90 @@
       </p:sp>
       <p:sp>
         <p:nvSpPr>
-          <p:cNvPr id="10" name="Text 8"/>
-          <p:cNvSpPr/>
-          <p:nvPr/>
-        </p:nvSpPr>
-        <p:spPr>
-          <a:xfrm>
-            <a:off x="731520" y="2286000"/>
-            <a:ext cx="1645920" cy="411480"/>
-          </a:xfrm>
-          <a:prstGeom prst="rect">
-            <a:avLst/>
-          </a:prstGeom>
-          <a:noFill/>
-          <a:ln/>
-        </p:spPr>
-        <p:txBody>
-          <a:bodyPr wrap="square" rtlCol="0" anchor="ctr"/>
-          <a:lstStyle/>
-          <a:p>
-            <a:pPr indent="0" marL="0">
-              <a:buNone/>
-            </a:pPr>
-            <a:r>
-              <a:rPr lang="en-US" sz="1300" b="1" dirty="0">
+          <p:cNvPr id="8" name="Text 6"/>
+          <p:cNvSpPr/>
+          <p:nvPr/>
+        </p:nvSpPr>
+        <p:spPr>
+          <a:xfrm>
+            <a:off x="777240" y="2139696"/>
+            <a:ext cx="4023360" cy="411480"/>
+          </a:xfrm>
+          <a:prstGeom prst="rect">
+            <a:avLst/>
+          </a:prstGeom>
+          <a:noFill/>
+          <a:ln/>
+        </p:spPr>
+        <p:txBody>
+          <a:bodyPr wrap="square" rtlCol="0" anchor="ctr"/>
+          <a:lstStyle/>
+          <a:p>
+            <a:pPr indent="0" marL="0">
+              <a:buNone/>
+            </a:pPr>
+            <a:r>
+              <a:rPr lang="en-US" sz="1250" b="1" dirty="0">
                 <a:solidFill>
                   <a:srgbClr val="D9F24B"/>
                 </a:solidFill>
               </a:rPr>
-              <a:t>Regional</a:t>
-            </a:r>
-            <a:endParaRPr lang="en-US" sz="1300" dirty="0"/>
-          </a:p>
-        </p:txBody>
-      </p:sp>
-      <p:sp>
-        <p:nvSpPr>
-          <p:cNvPr id="11" name="Text 9"/>
-          <p:cNvSpPr/>
-          <p:nvPr/>
-        </p:nvSpPr>
-        <p:spPr>
-          <a:xfrm>
-            <a:off x="2377440" y="2286000"/>
-            <a:ext cx="3108960" cy="411480"/>
-          </a:xfrm>
-          <a:prstGeom prst="rect">
-            <a:avLst/>
-          </a:prstGeom>
-          <a:noFill/>
-          <a:ln/>
-        </p:spPr>
-        <p:txBody>
-          <a:bodyPr wrap="square" rtlCol="0" anchor="ctr"/>
-          <a:lstStyle/>
-          <a:p>
-            <a:pPr indent="0" marL="0">
-              <a:buNone/>
-            </a:pPr>
-            <a:r>
-              <a:rPr lang="en-US" sz="1050" dirty="0">
+              <a:t>★ 100% of government services online (2024)</a:t>
+            </a:r>
+            <a:endParaRPr lang="en-US" sz="1250" dirty="0"/>
+          </a:p>
+        </p:txBody>
+      </p:sp>
+      <p:sp>
+        <p:nvSpPr>
+          <p:cNvPr id="9" name="Text 7"/>
+          <p:cNvSpPr/>
+          <p:nvPr/>
+        </p:nvSpPr>
+        <p:spPr>
+          <a:xfrm>
+            <a:off x="4937760" y="2139696"/>
+            <a:ext cx="3566160" cy="411480"/>
+          </a:xfrm>
+          <a:prstGeom prst="rect">
+            <a:avLst/>
+          </a:prstGeom>
+          <a:noFill/>
+          <a:ln/>
+        </p:spPr>
+        <p:txBody>
+          <a:bodyPr wrap="square" rtlCol="0" anchor="ctr"/>
+          <a:lstStyle/>
+          <a:p>
+            <a:pPr indent="0" marL="0">
+              <a:buNone/>
+            </a:pPr>
+            <a:r>
+              <a:rPr lang="en-US" sz="1100" dirty="0">
                 <a:solidFill>
                   <a:srgbClr val="FFFFFF"/>
                 </a:solidFill>
               </a:rPr>
-              <a:t>ICS cluster — identity + consent ledger + data adapter</a:t>
-            </a:r>
-            <a:endParaRPr lang="en-US" sz="1050" dirty="0"/>
-          </a:p>
-        </p:txBody>
-      </p:sp>
-      <p:sp>
-        <p:nvSpPr>
-          <p:cNvPr id="12" name="Text 10"/>
-          <p:cNvSpPr/>
-          <p:nvPr/>
-        </p:nvSpPr>
-        <p:spPr>
-          <a:xfrm>
-            <a:off x="5577840" y="2286000"/>
-            <a:ext cx="1554480" cy="411480"/>
-          </a:xfrm>
-          <a:prstGeom prst="rect">
-            <a:avLst/>
-          </a:prstGeom>
-          <a:noFill/>
-          <a:ln/>
-        </p:spPr>
-        <p:txBody>
-          <a:bodyPr wrap="square" rtlCol="0" anchor="ctr"/>
-          <a:lstStyle/>
-          <a:p>
-            <a:pPr indent="0" marL="0">
-              <a:buNone/>
-            </a:pPr>
-            <a:r>
-              <a:rPr lang="en-US" sz="1150" b="1" dirty="0">
-                <a:solidFill>
-                  <a:srgbClr val="4FCEE4"/>
-                </a:solidFill>
-              </a:rPr>
-              <a:t>£8M / yr</a:t>
-            </a:r>
-            <a:endParaRPr lang="en-US" sz="1150" dirty="0"/>
-          </a:p>
-        </p:txBody>
-      </p:sp>
-      <p:sp>
-        <p:nvSpPr>
-          <p:cNvPr id="13" name="Text 11"/>
-          <p:cNvSpPr/>
-          <p:nvPr/>
-        </p:nvSpPr>
-        <p:spPr>
-          <a:xfrm>
-            <a:off x="7223760" y="2286000"/>
-            <a:ext cx="1371600" cy="411480"/>
-          </a:xfrm>
-          <a:prstGeom prst="rect">
-            <a:avLst/>
-          </a:prstGeom>
-          <a:noFill/>
-          <a:ln/>
-        </p:spPr>
-        <p:txBody>
-          <a:bodyPr wrap="square" rtlCol="0" anchor="ctr"/>
-          <a:lstStyle/>
-          <a:p>
-            <a:pPr indent="0" marL="0">
-              <a:buNone/>
-            </a:pPr>
-            <a:r>
-              <a:rPr lang="en-US" sz="1000" dirty="0">
-                <a:solidFill>
-                  <a:srgbClr val="9AA0AC"/>
-                </a:solidFill>
-              </a:rPr>
-              <a:t>Scaled evidence</a:t>
-            </a:r>
-            <a:endParaRPr lang="en-US" sz="1000" dirty="0"/>
-          </a:p>
-        </p:txBody>
-      </p:sp>
-      <p:sp>
-        <p:nvSpPr>
-          <p:cNvPr id="14" name="Shape 12"/>
-          <p:cNvSpPr/>
-          <p:nvPr/>
-        </p:nvSpPr>
-        <p:spPr>
-          <a:xfrm>
-            <a:off x="548640" y="2926080"/>
-            <a:ext cx="8046720" cy="621792"/>
+              <a:t>The NHS can be the UK's first 100% digital public service</a:t>
+            </a:r>
+            <a:endParaRPr lang="en-US" sz="1100" dirty="0"/>
+          </a:p>
+        </p:txBody>
+      </p:sp>
+      <p:sp>
+        <p:nvSpPr>
+          <p:cNvPr id="10" name="Shape 8"/>
+          <p:cNvSpPr/>
+          <p:nvPr/>
+        </p:nvSpPr>
+        <p:spPr>
+          <a:xfrm>
+            <a:off x="548640" y="2734056"/>
+            <a:ext cx="8046720" cy="548640"/>
           </a:xfrm>
           <a:prstGeom prst="roundRect">
             <a:avLst>
-              <a:gd name="adj" fmla="val 10294"/>
+              <a:gd name="adj" fmla="val 11667"/>
             </a:avLst>
           </a:prstGeom>
           <a:solidFill>
@@ -5680,7 +5625,7 @@
           </a:solidFill>
           <a:ln w="6350">
             <a:solidFill>
-              <a:srgbClr val="4FCEE4"/>
+              <a:srgbClr val="D9F24B"/>
             </a:solidFill>
             <a:prstDash val="solid"/>
           </a:ln>
@@ -5688,162 +5633,90 @@
       </p:sp>
       <p:sp>
         <p:nvSpPr>
-          <p:cNvPr id="15" name="Text 13"/>
-          <p:cNvSpPr/>
-          <p:nvPr/>
-        </p:nvSpPr>
-        <p:spPr>
-          <a:xfrm>
-            <a:off x="731520" y="3017520"/>
-            <a:ext cx="1645920" cy="411480"/>
-          </a:xfrm>
-          <a:prstGeom prst="rect">
-            <a:avLst/>
-          </a:prstGeom>
-          <a:noFill/>
-          <a:ln/>
-        </p:spPr>
-        <p:txBody>
-          <a:bodyPr wrap="square" rtlCol="0" anchor="ctr"/>
-          <a:lstStyle/>
-          <a:p>
-            <a:pPr indent="0" marL="0">
-              <a:buNone/>
-            </a:pPr>
-            <a:r>
-              <a:rPr lang="en-US" sz="1300" b="1" dirty="0">
+          <p:cNvPr id="11" name="Text 9"/>
+          <p:cNvSpPr/>
+          <p:nvPr/>
+        </p:nvSpPr>
+        <p:spPr>
+          <a:xfrm>
+            <a:off x="777240" y="2798064"/>
+            <a:ext cx="4023360" cy="411480"/>
+          </a:xfrm>
+          <a:prstGeom prst="rect">
+            <a:avLst/>
+          </a:prstGeom>
+          <a:noFill/>
+          <a:ln/>
+        </p:spPr>
+        <p:txBody>
+          <a:bodyPr wrap="square" rtlCol="0" anchor="ctr"/>
+          <a:lstStyle/>
+          <a:p>
+            <a:pPr indent="0" marL="0">
+              <a:buNone/>
+            </a:pPr>
+            <a:r>
+              <a:rPr lang="en-US" sz="1250" b="1" dirty="0">
                 <a:solidFill>
                   <a:srgbClr val="D9F24B"/>
                 </a:solidFill>
               </a:rPr>
-              <a:t>National 50M</a:t>
-            </a:r>
-            <a:endParaRPr lang="en-US" sz="1300" dirty="0"/>
-          </a:p>
-        </p:txBody>
-      </p:sp>
-      <p:sp>
-        <p:nvSpPr>
-          <p:cNvPr id="16" name="Text 14"/>
-          <p:cNvSpPr/>
-          <p:nvPr/>
-        </p:nvSpPr>
-        <p:spPr>
-          <a:xfrm>
-            <a:off x="2377440" y="3017520"/>
-            <a:ext cx="3108960" cy="411480"/>
-          </a:xfrm>
-          <a:prstGeom prst="rect">
-            <a:avLst/>
-          </a:prstGeom>
-          <a:noFill/>
-          <a:ln/>
-        </p:spPr>
-        <p:txBody>
-          <a:bodyPr wrap="square" rtlCol="0" anchor="ctr"/>
-          <a:lstStyle/>
-          <a:p>
-            <a:pPr indent="0" marL="0">
-              <a:buNone/>
-            </a:pPr>
-            <a:r>
-              <a:rPr lang="en-US" sz="1050" dirty="0">
+              <a:t>★ 100% of patients have a national e-Health record</a:t>
+            </a:r>
+            <a:endParaRPr lang="en-US" sz="1250" dirty="0"/>
+          </a:p>
+        </p:txBody>
+      </p:sp>
+      <p:sp>
+        <p:nvSpPr>
+          <p:cNvPr id="12" name="Text 10"/>
+          <p:cNvSpPr/>
+          <p:nvPr/>
+        </p:nvSpPr>
+        <p:spPr>
+          <a:xfrm>
+            <a:off x="4937760" y="2798064"/>
+            <a:ext cx="3566160" cy="411480"/>
+          </a:xfrm>
+          <a:prstGeom prst="rect">
+            <a:avLst/>
+          </a:prstGeom>
+          <a:noFill/>
+          <a:ln/>
+        </p:spPr>
+        <p:txBody>
+          <a:bodyPr wrap="square" rtlCol="0" anchor="ctr"/>
+          <a:lstStyle/>
+          <a:p>
+            <a:pPr indent="0" marL="0">
+              <a:buNone/>
+            </a:pPr>
+            <a:r>
+              <a:rPr lang="en-US" sz="1100" dirty="0">
                 <a:solidFill>
                   <a:srgbClr val="FFFFFF"/>
                 </a:solidFill>
               </a:rPr>
-              <a:t>NHS England full rollout — cards + ZEUS DOC + AEGIS + registries</a:t>
-            </a:r>
-            <a:endParaRPr lang="en-US" sz="1050" dirty="0"/>
-          </a:p>
-        </p:txBody>
-      </p:sp>
-      <p:sp>
-        <p:nvSpPr>
-          <p:cNvPr id="17" name="Text 15"/>
-          <p:cNvSpPr/>
-          <p:nvPr/>
-        </p:nvSpPr>
-        <p:spPr>
-          <a:xfrm>
-            <a:off x="5577840" y="3017520"/>
-            <a:ext cx="1554480" cy="411480"/>
-          </a:xfrm>
-          <a:prstGeom prst="rect">
-            <a:avLst/>
-          </a:prstGeom>
-          <a:noFill/>
-          <a:ln/>
-        </p:spPr>
-        <p:txBody>
-          <a:bodyPr wrap="square" rtlCol="0" anchor="ctr"/>
-          <a:lstStyle/>
-          <a:p>
-            <a:pPr indent="0" marL="0">
-              <a:buNone/>
-            </a:pPr>
-            <a:r>
-              <a:rPr lang="en-US" sz="1150" b="1" dirty="0">
-                <a:solidFill>
-                  <a:srgbClr val="4FCEE4"/>
-                </a:solidFill>
-              </a:rPr>
-              <a:t>£86M / yr (10yr £865M)</a:t>
-            </a:r>
-            <a:endParaRPr lang="en-US" sz="1150" dirty="0"/>
-          </a:p>
-        </p:txBody>
-      </p:sp>
-      <p:sp>
-        <p:nvSpPr>
-          <p:cNvPr id="18" name="Text 16"/>
-          <p:cNvSpPr/>
-          <p:nvPr/>
-        </p:nvSpPr>
-        <p:spPr>
-          <a:xfrm>
-            <a:off x="7223760" y="3017520"/>
-            <a:ext cx="1371600" cy="411480"/>
-          </a:xfrm>
-          <a:prstGeom prst="rect">
-            <a:avLst/>
-          </a:prstGeom>
-          <a:noFill/>
-          <a:ln/>
-        </p:spPr>
-        <p:txBody>
-          <a:bodyPr wrap="square" rtlCol="0" anchor="ctr"/>
-          <a:lstStyle/>
-          <a:p>
-            <a:pPr indent="0" marL="0">
-              <a:buNone/>
-            </a:pPr>
-            <a:r>
-              <a:rPr lang="en-US" sz="1000" dirty="0">
-                <a:solidFill>
-                  <a:srgbClr val="9AA0AC"/>
-                </a:solidFill>
-              </a:rPr>
-              <a:t>£24.4B · 28.2x ROI</a:t>
-            </a:r>
-            <a:endParaRPr lang="en-US" sz="1000" dirty="0"/>
-          </a:p>
-        </p:txBody>
-      </p:sp>
-      <p:sp>
-        <p:nvSpPr>
-          <p:cNvPr id="19" name="Shape 17"/>
-          <p:cNvSpPr/>
-          <p:nvPr/>
-        </p:nvSpPr>
-        <p:spPr>
-          <a:xfrm>
-            <a:off x="548640" y="3657600"/>
-            <a:ext cx="8046720" cy="621792"/>
+              <a:t>Identity is the key that unlocks joined-up care data</a:t>
+            </a:r>
+            <a:endParaRPr lang="en-US" sz="1100" dirty="0"/>
+          </a:p>
+        </p:txBody>
+      </p:sp>
+      <p:sp>
+        <p:nvSpPr>
+          <p:cNvPr id="13" name="Shape 11"/>
+          <p:cNvSpPr/>
+          <p:nvPr/>
+        </p:nvSpPr>
+        <p:spPr>
+          <a:xfrm>
+            <a:off x="548640" y="3392424"/>
+            <a:ext cx="8046720" cy="548640"/>
           </a:xfrm>
           <a:prstGeom prst="roundRect">
             <a:avLst>
-              <a:gd name="adj" fmla="val 10294"/>
+              <a:gd name="adj" fmla="val 11667"/>
             </a:avLst>
           </a:prstGeom>
           <a:solidFill>
@@ -5851,7 +5724,7 @@
           </a:solidFill>
           <a:ln w="6350">
             <a:solidFill>
-              <a:srgbClr val="4FCEE4"/>
+              <a:srgbClr val="D9F24B"/>
             </a:solidFill>
             <a:prstDash val="solid"/>
           </a:ln>
@@ -5859,187 +5732,214 @@
       </p:sp>
       <p:sp>
         <p:nvSpPr>
+          <p:cNvPr id="14" name="Text 12"/>
+          <p:cNvSpPr/>
+          <p:nvPr/>
+        </p:nvSpPr>
+        <p:spPr>
+          <a:xfrm>
+            <a:off x="777240" y="3456432"/>
+            <a:ext cx="4023360" cy="411480"/>
+          </a:xfrm>
+          <a:prstGeom prst="rect">
+            <a:avLst/>
+          </a:prstGeom>
+          <a:noFill/>
+          <a:ln/>
+        </p:spPr>
+        <p:txBody>
+          <a:bodyPr wrap="square" rtlCol="0" anchor="ctr"/>
+          <a:lstStyle/>
+          <a:p>
+            <a:pPr indent="0" marL="0">
+              <a:buNone/>
+            </a:pPr>
+            <a:r>
+              <a:rPr lang="en-US" sz="1250" b="1" dirty="0">
+                <a:solidFill>
+                  <a:srgbClr val="D9F24B"/>
+                </a:solidFill>
+              </a:rPr>
+              <a:t>★ Digital signatures save 2% of GDP annually</a:t>
+            </a:r>
+            <a:endParaRPr lang="en-US" sz="1250" dirty="0"/>
+          </a:p>
+        </p:txBody>
+      </p:sp>
+      <p:sp>
+        <p:nvSpPr>
+          <p:cNvPr id="15" name="Text 13"/>
+          <p:cNvSpPr/>
+          <p:nvPr/>
+        </p:nvSpPr>
+        <p:spPr>
+          <a:xfrm>
+            <a:off x="4937760" y="3456432"/>
+            <a:ext cx="3566160" cy="411480"/>
+          </a:xfrm>
+          <a:prstGeom prst="rect">
+            <a:avLst/>
+          </a:prstGeom>
+          <a:noFill/>
+          <a:ln/>
+        </p:spPr>
+        <p:txBody>
+          <a:bodyPr wrap="square" rtlCol="0" anchor="ctr"/>
+          <a:lstStyle/>
+          <a:p>
+            <a:pPr indent="0" marL="0">
+              <a:buNone/>
+            </a:pPr>
+            <a:r>
+              <a:rPr lang="en-US" sz="1100" dirty="0">
+                <a:solidFill>
+                  <a:srgbClr val="FFFFFF"/>
+                </a:solidFill>
+              </a:rPr>
+              <a:t>Measurable ROI for consent &amp; clinical e-signing</a:t>
+            </a:r>
+            <a:endParaRPr lang="en-US" sz="1100" dirty="0"/>
+          </a:p>
+        </p:txBody>
+      </p:sp>
+      <p:sp>
+        <p:nvSpPr>
+          <p:cNvPr id="16" name="Shape 14"/>
+          <p:cNvSpPr/>
+          <p:nvPr/>
+        </p:nvSpPr>
+        <p:spPr>
+          <a:xfrm>
+            <a:off x="548640" y="4050792"/>
+            <a:ext cx="8046720" cy="548640"/>
+          </a:xfrm>
+          <a:prstGeom prst="roundRect">
+            <a:avLst>
+              <a:gd name="adj" fmla="val 11667"/>
+            </a:avLst>
+          </a:prstGeom>
+          <a:solidFill>
+            <a:srgbClr val="1B2030"/>
+          </a:solidFill>
+          <a:ln w="6350">
+            <a:solidFill>
+              <a:srgbClr val="D9F24B"/>
+            </a:solidFill>
+            <a:prstDash val="solid"/>
+          </a:ln>
+        </p:spPr>
+      </p:sp>
+      <p:sp>
+        <p:nvSpPr>
+          <p:cNvPr id="17" name="Text 15"/>
+          <p:cNvSpPr/>
+          <p:nvPr/>
+        </p:nvSpPr>
+        <p:spPr>
+          <a:xfrm>
+            <a:off x="777240" y="4114800"/>
+            <a:ext cx="4023360" cy="411480"/>
+          </a:xfrm>
+          <a:prstGeom prst="rect">
+            <a:avLst/>
+          </a:prstGeom>
+          <a:noFill/>
+          <a:ln/>
+        </p:spPr>
+        <p:txBody>
+          <a:bodyPr wrap="square" rtlCol="0" anchor="ctr"/>
+          <a:lstStyle/>
+          <a:p>
+            <a:pPr indent="0" marL="0">
+              <a:buNone/>
+            </a:pPr>
+            <a:r>
+              <a:rPr lang="en-US" sz="1250" b="1" dirty="0">
+                <a:solidFill>
+                  <a:srgbClr val="D9F24B"/>
+                </a:solidFill>
+              </a:rPr>
+              <a:t>★ 100% of prescriptions handled online</a:t>
+            </a:r>
+            <a:endParaRPr lang="en-US" sz="1250" dirty="0"/>
+          </a:p>
+        </p:txBody>
+      </p:sp>
+      <p:sp>
+        <p:nvSpPr>
+          <p:cNvPr id="18" name="Text 16"/>
+          <p:cNvSpPr/>
+          <p:nvPr/>
+        </p:nvSpPr>
+        <p:spPr>
+          <a:xfrm>
+            <a:off x="4937760" y="4114800"/>
+            <a:ext cx="3566160" cy="411480"/>
+          </a:xfrm>
+          <a:prstGeom prst="rect">
+            <a:avLst/>
+          </a:prstGeom>
+          <a:noFill/>
+          <a:ln/>
+        </p:spPr>
+        <p:txBody>
+          <a:bodyPr wrap="square" rtlCol="0" anchor="ctr"/>
+          <a:lstStyle/>
+          <a:p>
+            <a:pPr indent="0" marL="0">
+              <a:buNone/>
+            </a:pPr>
+            <a:r>
+              <a:rPr lang="en-US" sz="1100" dirty="0">
+                <a:solidFill>
+                  <a:srgbClr val="FFFFFF"/>
+                </a:solidFill>
+              </a:rPr>
+              <a:t>Paperless medicines workflow, end to end</a:t>
+            </a:r>
+            <a:endParaRPr lang="en-US" sz="1100" dirty="0"/>
+          </a:p>
+        </p:txBody>
+      </p:sp>
+      <p:sp>
+        <p:nvSpPr>
+          <p:cNvPr id="19" name="Text 17"/>
+          <p:cNvSpPr/>
+          <p:nvPr/>
+        </p:nvSpPr>
+        <p:spPr>
+          <a:xfrm>
+            <a:off x="548640" y="4617720"/>
+            <a:ext cx="8046720" cy="365760"/>
+          </a:xfrm>
+          <a:prstGeom prst="rect">
+            <a:avLst/>
+          </a:prstGeom>
+          <a:noFill/>
+          <a:ln/>
+        </p:spPr>
+        <p:txBody>
+          <a:bodyPr wrap="square" rtlCol="0" anchor="ctr"/>
+          <a:lstStyle/>
+          <a:p>
+            <a:pPr indent="0" marL="0">
+              <a:buNone/>
+            </a:pPr>
+            <a:r>
+              <a:rPr lang="en-US" sz="1200" b="1" dirty="0">
+                <a:solidFill>
+                  <a:srgbClr val="4FCEE4"/>
+                </a:solidFill>
+              </a:rPr>
+              <a:t>Named national awardee of the e-Estonia reference model — ZEUS matches the blueprint + AEGIS AI security + UK sovereignty.</a:t>
+            </a:r>
+            <a:endParaRPr lang="en-US" sz="1200" dirty="0"/>
+          </a:p>
+        </p:txBody>
+      </p:sp>
+      <p:sp>
+        <p:nvSpPr>
           <p:cNvPr id="20" name="Text 18"/>
-          <p:cNvSpPr/>
-          <p:nvPr/>
-        </p:nvSpPr>
-        <p:spPr>
-          <a:xfrm>
-            <a:off x="731520" y="3749040"/>
-            <a:ext cx="1645920" cy="411480"/>
-          </a:xfrm>
-          <a:prstGeom prst="rect">
-            <a:avLst/>
-          </a:prstGeom>
-          <a:noFill/>
-          <a:ln/>
-        </p:spPr>
-        <p:txBody>
-          <a:bodyPr wrap="square" rtlCol="0" anchor="ctr"/>
-          <a:lstStyle/>
-          <a:p>
-            <a:pPr indent="0" marL="0">
-              <a:buNone/>
-            </a:pPr>
-            <a:r>
-              <a:rPr lang="en-US" sz="1300" b="1" dirty="0">
-                <a:solidFill>
-                  <a:srgbClr val="D9F24B"/>
-                </a:solidFill>
-              </a:rPr>
-              <a:t>White-label</a:t>
-            </a:r>
-            <a:endParaRPr lang="en-US" sz="1300" dirty="0"/>
-          </a:p>
-        </p:txBody>
-      </p:sp>
-      <p:sp>
-        <p:nvSpPr>
-          <p:cNvPr id="21" name="Text 19"/>
-          <p:cNvSpPr/>
-          <p:nvPr/>
-        </p:nvSpPr>
-        <p:spPr>
-          <a:xfrm>
-            <a:off x="2377440" y="3749040"/>
-            <a:ext cx="3108960" cy="411480"/>
-          </a:xfrm>
-          <a:prstGeom prst="rect">
-            <a:avLst/>
-          </a:prstGeom>
-          <a:noFill/>
-          <a:ln/>
-        </p:spPr>
-        <p:txBody>
-          <a:bodyPr wrap="square" rtlCol="0" anchor="ctr"/>
-          <a:lstStyle/>
-          <a:p>
-            <a:pPr indent="0" marL="0">
-              <a:buNone/>
-            </a:pPr>
-            <a:r>
-              <a:rPr lang="en-US" sz="1050" dirty="0">
-                <a:solidFill>
-                  <a:srgbClr val="FFFFFF"/>
-                </a:solidFill>
-              </a:rPr>
-              <a:t>Licence / export — other public sectors, international</a:t>
-            </a:r>
-            <a:endParaRPr lang="en-US" sz="1050" dirty="0"/>
-          </a:p>
-        </p:txBody>
-      </p:sp>
-      <p:sp>
-        <p:nvSpPr>
-          <p:cNvPr id="22" name="Text 20"/>
-          <p:cNvSpPr/>
-          <p:nvPr/>
-        </p:nvSpPr>
-        <p:spPr>
-          <a:xfrm>
-            <a:off x="5577840" y="3749040"/>
-            <a:ext cx="1554480" cy="411480"/>
-          </a:xfrm>
-          <a:prstGeom prst="rect">
-            <a:avLst/>
-          </a:prstGeom>
-          <a:noFill/>
-          <a:ln/>
-        </p:spPr>
-        <p:txBody>
-          <a:bodyPr wrap="square" rtlCol="0" anchor="ctr"/>
-          <a:lstStyle/>
-          <a:p>
-            <a:pPr indent="0" marL="0">
-              <a:buNone/>
-            </a:pPr>
-            <a:r>
-              <a:rPr lang="en-US" sz="1150" b="1" dirty="0">
-                <a:solidFill>
-                  <a:srgbClr val="4FCEE4"/>
-                </a:solidFill>
-              </a:rPr>
-              <a:t>Bespoke</a:t>
-            </a:r>
-            <a:endParaRPr lang="en-US" sz="1150" dirty="0"/>
-          </a:p>
-        </p:txBody>
-      </p:sp>
-      <p:sp>
-        <p:nvSpPr>
-          <p:cNvPr id="23" name="Text 21"/>
-          <p:cNvSpPr/>
-          <p:nvPr/>
-        </p:nvSpPr>
-        <p:spPr>
-          <a:xfrm>
-            <a:off x="7223760" y="3749040"/>
-            <a:ext cx="1371600" cy="411480"/>
-          </a:xfrm>
-          <a:prstGeom prst="rect">
-            <a:avLst/>
-          </a:prstGeom>
-          <a:noFill/>
-          <a:ln/>
-        </p:spPr>
-        <p:txBody>
-          <a:bodyPr wrap="square" rtlCol="0" anchor="ctr"/>
-          <a:lstStyle/>
-          <a:p>
-            <a:pPr indent="0" marL="0">
-              <a:buNone/>
-            </a:pPr>
-            <a:r>
-              <a:rPr lang="en-US" sz="1000" dirty="0">
-                <a:solidFill>
-                  <a:srgbClr val="9AA0AC"/>
-                </a:solidFill>
-              </a:rPr>
-              <a:t>Recurring licence</a:t>
-            </a:r>
-            <a:endParaRPr lang="en-US" sz="1000" dirty="0"/>
-          </a:p>
-        </p:txBody>
-      </p:sp>
-      <p:sp>
-        <p:nvSpPr>
-          <p:cNvPr id="24" name="Text 22"/>
-          <p:cNvSpPr/>
-          <p:nvPr/>
-        </p:nvSpPr>
-        <p:spPr>
-          <a:xfrm>
-            <a:off x="548640" y="4526280"/>
-            <a:ext cx="8046720" cy="365760"/>
-          </a:xfrm>
-          <a:prstGeom prst="rect">
-            <a:avLst/>
-          </a:prstGeom>
-          <a:noFill/>
-          <a:ln/>
-        </p:spPr>
-        <p:txBody>
-          <a:bodyPr wrap="square" rtlCol="0" anchor="ctr"/>
-          <a:lstStyle/>
-          <a:p>
-            <a:pPr indent="0" marL="0">
-              <a:buNone/>
-            </a:pPr>
-            <a:r>
-              <a:rPr lang="en-US" sz="1250" b="1" dirty="0">
-                <a:solidFill>
-                  <a:srgbClr val="D9F24B"/>
-                </a:solidFill>
-              </a:rPr>
-              <a:t>Break-even at each tier covered by efficiency gains: signatures, consent automation, fraud reduction.</a:t>
-            </a:r>
-            <a:endParaRPr lang="en-US" sz="1250" dirty="0"/>
-          </a:p>
-        </p:txBody>
-      </p:sp>
-      <p:sp>
-        <p:nvSpPr>
-          <p:cNvPr id="25" name="Text 23"/>
           <p:cNvSpPr/>
           <p:nvPr/>
         </p:nvSpPr>
@@ -6075,7 +5975,7 @@
       </p:sp>
       <p:sp>
         <p:nvSpPr>
-          <p:cNvPr id="26" name="Text 24"/>
+          <p:cNvPr id="21" name="Text 19"/>
           <p:cNvSpPr/>
           <p:nvPr/>
         </p:nvSpPr>
@@ -6171,6 +6071,902 @@
                   <a:srgbClr val="4FCEE4"/>
                 </a:solidFill>
               </a:rPr>
+              <a:t>COMMERCIAL MODEL — TIERS</a:t>
+            </a:r>
+            <a:endParaRPr lang="en-US" sz="2200" dirty="0"/>
+          </a:p>
+        </p:txBody>
+      </p:sp>
+      <p:sp>
+        <p:nvSpPr>
+          <p:cNvPr id="3" name="Text 1"/>
+          <p:cNvSpPr/>
+          <p:nvPr/>
+        </p:nvSpPr>
+        <p:spPr>
+          <a:xfrm>
+            <a:off x="548640" y="914400"/>
+            <a:ext cx="8046720" cy="365760"/>
+          </a:xfrm>
+          <a:prstGeom prst="rect">
+            <a:avLst/>
+          </a:prstGeom>
+          <a:noFill/>
+          <a:ln/>
+        </p:spPr>
+        <p:txBody>
+          <a:bodyPr wrap="square" rtlCol="0" anchor="ctr"/>
+          <a:lstStyle/>
+          <a:p>
+            <a:pPr indent="0" marL="0">
+              <a:buNone/>
+            </a:pPr>
+            <a:r>
+              <a:rPr lang="en-US" sz="1300" dirty="0">
+                <a:solidFill>
+                  <a:srgbClr val="9AA0AC"/>
+                </a:solidFill>
+              </a:rPr>
+              <a:t>Anchored to the programme business case: £24.4B value · 28.2x ROI · 10yr NHS England. Indicative, negotiable.</a:t>
+            </a:r>
+            <a:endParaRPr lang="en-US" sz="1300" dirty="0"/>
+          </a:p>
+        </p:txBody>
+      </p:sp>
+      <p:sp>
+        <p:nvSpPr>
+          <p:cNvPr id="4" name="Shape 2"/>
+          <p:cNvSpPr/>
+          <p:nvPr/>
+        </p:nvSpPr>
+        <p:spPr>
+          <a:xfrm>
+            <a:off x="548640" y="1463040"/>
+            <a:ext cx="8046720" cy="621792"/>
+          </a:xfrm>
+          <a:prstGeom prst="roundRect">
+            <a:avLst>
+              <a:gd name="adj" fmla="val 10294"/>
+            </a:avLst>
+          </a:prstGeom>
+          <a:solidFill>
+            <a:srgbClr val="1B2030"/>
+          </a:solidFill>
+          <a:ln w="6350">
+            <a:solidFill>
+              <a:srgbClr val="4FCEE4"/>
+            </a:solidFill>
+            <a:prstDash val="solid"/>
+          </a:ln>
+        </p:spPr>
+      </p:sp>
+      <p:sp>
+        <p:nvSpPr>
+          <p:cNvPr id="5" name="Text 3"/>
+          <p:cNvSpPr/>
+          <p:nvPr/>
+        </p:nvSpPr>
+        <p:spPr>
+          <a:xfrm>
+            <a:off x="731520" y="1554480"/>
+            <a:ext cx="1645920" cy="411480"/>
+          </a:xfrm>
+          <a:prstGeom prst="rect">
+            <a:avLst/>
+          </a:prstGeom>
+          <a:noFill/>
+          <a:ln/>
+        </p:spPr>
+        <p:txBody>
+          <a:bodyPr wrap="square" rtlCol="0" anchor="ctr"/>
+          <a:lstStyle/>
+          <a:p>
+            <a:pPr indent="0" marL="0">
+              <a:buNone/>
+            </a:pPr>
+            <a:r>
+              <a:rPr lang="en-US" sz="1300" b="1" dirty="0">
+                <a:solidFill>
+                  <a:srgbClr val="D9F24B"/>
+                </a:solidFill>
+              </a:rPr>
+              <a:t>Pilot</a:t>
+            </a:r>
+            <a:endParaRPr lang="en-US" sz="1300" dirty="0"/>
+          </a:p>
+        </p:txBody>
+      </p:sp>
+      <p:sp>
+        <p:nvSpPr>
+          <p:cNvPr id="6" name="Text 4"/>
+          <p:cNvSpPr/>
+          <p:nvPr/>
+        </p:nvSpPr>
+        <p:spPr>
+          <a:xfrm>
+            <a:off x="2377440" y="1554480"/>
+            <a:ext cx="3108960" cy="411480"/>
+          </a:xfrm>
+          <a:prstGeom prst="rect">
+            <a:avLst/>
+          </a:prstGeom>
+          <a:noFill/>
+          <a:ln/>
+        </p:spPr>
+        <p:txBody>
+          <a:bodyPr wrap="square" rtlCol="0" anchor="ctr"/>
+          <a:lstStyle/>
+          <a:p>
+            <a:pPr indent="0" marL="0">
+              <a:buNone/>
+            </a:pPr>
+            <a:r>
+              <a:rPr lang="en-US" sz="1050" dirty="0">
+                <a:solidFill>
+                  <a:srgbClr val="FFFFFF"/>
+                </a:solidFill>
+              </a:rPr>
+              <a:t>One ICB / trust region — ZEUS DOC + AEGIS + 100k cards</a:t>
+            </a:r>
+            <a:endParaRPr lang="en-US" sz="1050" dirty="0"/>
+          </a:p>
+        </p:txBody>
+      </p:sp>
+      <p:sp>
+        <p:nvSpPr>
+          <p:cNvPr id="7" name="Text 5"/>
+          <p:cNvSpPr/>
+          <p:nvPr/>
+        </p:nvSpPr>
+        <p:spPr>
+          <a:xfrm>
+            <a:off x="5577840" y="1554480"/>
+            <a:ext cx="1554480" cy="411480"/>
+          </a:xfrm>
+          <a:prstGeom prst="rect">
+            <a:avLst/>
+          </a:prstGeom>
+          <a:noFill/>
+          <a:ln/>
+        </p:spPr>
+        <p:txBody>
+          <a:bodyPr wrap="square" rtlCol="0" anchor="ctr"/>
+          <a:lstStyle/>
+          <a:p>
+            <a:pPr indent="0" marL="0">
+              <a:buNone/>
+            </a:pPr>
+            <a:r>
+              <a:rPr lang="en-US" sz="1150" b="1" dirty="0">
+                <a:solidFill>
+                  <a:srgbClr val="4FCEE4"/>
+                </a:solidFill>
+              </a:rPr>
+              <a:t>£1.0M / yr</a:t>
+            </a:r>
+            <a:endParaRPr lang="en-US" sz="1150" dirty="0"/>
+          </a:p>
+        </p:txBody>
+      </p:sp>
+      <p:sp>
+        <p:nvSpPr>
+          <p:cNvPr id="8" name="Text 6"/>
+          <p:cNvSpPr/>
+          <p:nvPr/>
+        </p:nvSpPr>
+        <p:spPr>
+          <a:xfrm>
+            <a:off x="7223760" y="1554480"/>
+            <a:ext cx="1371600" cy="411480"/>
+          </a:xfrm>
+          <a:prstGeom prst="rect">
+            <a:avLst/>
+          </a:prstGeom>
+          <a:noFill/>
+          <a:ln/>
+        </p:spPr>
+        <p:txBody>
+          <a:bodyPr wrap="square" rtlCol="0" anchor="ctr"/>
+          <a:lstStyle/>
+          <a:p>
+            <a:pPr indent="0" marL="0">
+              <a:buNone/>
+            </a:pPr>
+            <a:r>
+              <a:rPr lang="en-US" sz="1000" dirty="0">
+                <a:solidFill>
+                  <a:srgbClr val="9AA0AC"/>
+                </a:solidFill>
+              </a:rPr>
+              <a:t>Proof, live in 90 days</a:t>
+            </a:r>
+            <a:endParaRPr lang="en-US" sz="1000" dirty="0"/>
+          </a:p>
+        </p:txBody>
+      </p:sp>
+      <p:sp>
+        <p:nvSpPr>
+          <p:cNvPr id="9" name="Shape 7"/>
+          <p:cNvSpPr/>
+          <p:nvPr/>
+        </p:nvSpPr>
+        <p:spPr>
+          <a:xfrm>
+            <a:off x="548640" y="2194560"/>
+            <a:ext cx="8046720" cy="621792"/>
+          </a:xfrm>
+          <a:prstGeom prst="roundRect">
+            <a:avLst>
+              <a:gd name="adj" fmla="val 10294"/>
+            </a:avLst>
+          </a:prstGeom>
+          <a:solidFill>
+            <a:srgbClr val="1B2030"/>
+          </a:solidFill>
+          <a:ln w="6350">
+            <a:solidFill>
+              <a:srgbClr val="4FCEE4"/>
+            </a:solidFill>
+            <a:prstDash val="solid"/>
+          </a:ln>
+        </p:spPr>
+      </p:sp>
+      <p:sp>
+        <p:nvSpPr>
+          <p:cNvPr id="10" name="Text 8"/>
+          <p:cNvSpPr/>
+          <p:nvPr/>
+        </p:nvSpPr>
+        <p:spPr>
+          <a:xfrm>
+            <a:off x="731520" y="2286000"/>
+            <a:ext cx="1645920" cy="411480"/>
+          </a:xfrm>
+          <a:prstGeom prst="rect">
+            <a:avLst/>
+          </a:prstGeom>
+          <a:noFill/>
+          <a:ln/>
+        </p:spPr>
+        <p:txBody>
+          <a:bodyPr wrap="square" rtlCol="0" anchor="ctr"/>
+          <a:lstStyle/>
+          <a:p>
+            <a:pPr indent="0" marL="0">
+              <a:buNone/>
+            </a:pPr>
+            <a:r>
+              <a:rPr lang="en-US" sz="1300" b="1" dirty="0">
+                <a:solidFill>
+                  <a:srgbClr val="D9F24B"/>
+                </a:solidFill>
+              </a:rPr>
+              <a:t>Regional</a:t>
+            </a:r>
+            <a:endParaRPr lang="en-US" sz="1300" dirty="0"/>
+          </a:p>
+        </p:txBody>
+      </p:sp>
+      <p:sp>
+        <p:nvSpPr>
+          <p:cNvPr id="11" name="Text 9"/>
+          <p:cNvSpPr/>
+          <p:nvPr/>
+        </p:nvSpPr>
+        <p:spPr>
+          <a:xfrm>
+            <a:off x="2377440" y="2286000"/>
+            <a:ext cx="3108960" cy="411480"/>
+          </a:xfrm>
+          <a:prstGeom prst="rect">
+            <a:avLst/>
+          </a:prstGeom>
+          <a:noFill/>
+          <a:ln/>
+        </p:spPr>
+        <p:txBody>
+          <a:bodyPr wrap="square" rtlCol="0" anchor="ctr"/>
+          <a:lstStyle/>
+          <a:p>
+            <a:pPr indent="0" marL="0">
+              <a:buNone/>
+            </a:pPr>
+            <a:r>
+              <a:rPr lang="en-US" sz="1050" dirty="0">
+                <a:solidFill>
+                  <a:srgbClr val="FFFFFF"/>
+                </a:solidFill>
+              </a:rPr>
+              <a:t>ICS cluster — identity + consent ledger + data adapter</a:t>
+            </a:r>
+            <a:endParaRPr lang="en-US" sz="1050" dirty="0"/>
+          </a:p>
+        </p:txBody>
+      </p:sp>
+      <p:sp>
+        <p:nvSpPr>
+          <p:cNvPr id="12" name="Text 10"/>
+          <p:cNvSpPr/>
+          <p:nvPr/>
+        </p:nvSpPr>
+        <p:spPr>
+          <a:xfrm>
+            <a:off x="5577840" y="2286000"/>
+            <a:ext cx="1554480" cy="411480"/>
+          </a:xfrm>
+          <a:prstGeom prst="rect">
+            <a:avLst/>
+          </a:prstGeom>
+          <a:noFill/>
+          <a:ln/>
+        </p:spPr>
+        <p:txBody>
+          <a:bodyPr wrap="square" rtlCol="0" anchor="ctr"/>
+          <a:lstStyle/>
+          <a:p>
+            <a:pPr indent="0" marL="0">
+              <a:buNone/>
+            </a:pPr>
+            <a:r>
+              <a:rPr lang="en-US" sz="1150" b="1" dirty="0">
+                <a:solidFill>
+                  <a:srgbClr val="4FCEE4"/>
+                </a:solidFill>
+              </a:rPr>
+              <a:t>£8M / yr</a:t>
+            </a:r>
+            <a:endParaRPr lang="en-US" sz="1150" dirty="0"/>
+          </a:p>
+        </p:txBody>
+      </p:sp>
+      <p:sp>
+        <p:nvSpPr>
+          <p:cNvPr id="13" name="Text 11"/>
+          <p:cNvSpPr/>
+          <p:nvPr/>
+        </p:nvSpPr>
+        <p:spPr>
+          <a:xfrm>
+            <a:off x="7223760" y="2286000"/>
+            <a:ext cx="1371600" cy="411480"/>
+          </a:xfrm>
+          <a:prstGeom prst="rect">
+            <a:avLst/>
+          </a:prstGeom>
+          <a:noFill/>
+          <a:ln/>
+        </p:spPr>
+        <p:txBody>
+          <a:bodyPr wrap="square" rtlCol="0" anchor="ctr"/>
+          <a:lstStyle/>
+          <a:p>
+            <a:pPr indent="0" marL="0">
+              <a:buNone/>
+            </a:pPr>
+            <a:r>
+              <a:rPr lang="en-US" sz="1000" dirty="0">
+                <a:solidFill>
+                  <a:srgbClr val="9AA0AC"/>
+                </a:solidFill>
+              </a:rPr>
+              <a:t>Scaled evidence</a:t>
+            </a:r>
+            <a:endParaRPr lang="en-US" sz="1000" dirty="0"/>
+          </a:p>
+        </p:txBody>
+      </p:sp>
+      <p:sp>
+        <p:nvSpPr>
+          <p:cNvPr id="14" name="Shape 12"/>
+          <p:cNvSpPr/>
+          <p:nvPr/>
+        </p:nvSpPr>
+        <p:spPr>
+          <a:xfrm>
+            <a:off x="548640" y="2926080"/>
+            <a:ext cx="8046720" cy="621792"/>
+          </a:xfrm>
+          <a:prstGeom prst="roundRect">
+            <a:avLst>
+              <a:gd name="adj" fmla="val 10294"/>
+            </a:avLst>
+          </a:prstGeom>
+          <a:solidFill>
+            <a:srgbClr val="1B2030"/>
+          </a:solidFill>
+          <a:ln w="6350">
+            <a:solidFill>
+              <a:srgbClr val="4FCEE4"/>
+            </a:solidFill>
+            <a:prstDash val="solid"/>
+          </a:ln>
+        </p:spPr>
+      </p:sp>
+      <p:sp>
+        <p:nvSpPr>
+          <p:cNvPr id="15" name="Text 13"/>
+          <p:cNvSpPr/>
+          <p:nvPr/>
+        </p:nvSpPr>
+        <p:spPr>
+          <a:xfrm>
+            <a:off x="731520" y="3017520"/>
+            <a:ext cx="1645920" cy="411480"/>
+          </a:xfrm>
+          <a:prstGeom prst="rect">
+            <a:avLst/>
+          </a:prstGeom>
+          <a:noFill/>
+          <a:ln/>
+        </p:spPr>
+        <p:txBody>
+          <a:bodyPr wrap="square" rtlCol="0" anchor="ctr"/>
+          <a:lstStyle/>
+          <a:p>
+            <a:pPr indent="0" marL="0">
+              <a:buNone/>
+            </a:pPr>
+            <a:r>
+              <a:rPr lang="en-US" sz="1300" b="1" dirty="0">
+                <a:solidFill>
+                  <a:srgbClr val="D9F24B"/>
+                </a:solidFill>
+              </a:rPr>
+              <a:t>National 50M</a:t>
+            </a:r>
+            <a:endParaRPr lang="en-US" sz="1300" dirty="0"/>
+          </a:p>
+        </p:txBody>
+      </p:sp>
+      <p:sp>
+        <p:nvSpPr>
+          <p:cNvPr id="16" name="Text 14"/>
+          <p:cNvSpPr/>
+          <p:nvPr/>
+        </p:nvSpPr>
+        <p:spPr>
+          <a:xfrm>
+            <a:off x="2377440" y="3017520"/>
+            <a:ext cx="3108960" cy="411480"/>
+          </a:xfrm>
+          <a:prstGeom prst="rect">
+            <a:avLst/>
+          </a:prstGeom>
+          <a:noFill/>
+          <a:ln/>
+        </p:spPr>
+        <p:txBody>
+          <a:bodyPr wrap="square" rtlCol="0" anchor="ctr"/>
+          <a:lstStyle/>
+          <a:p>
+            <a:pPr indent="0" marL="0">
+              <a:buNone/>
+            </a:pPr>
+            <a:r>
+              <a:rPr lang="en-US" sz="1050" dirty="0">
+                <a:solidFill>
+                  <a:srgbClr val="FFFFFF"/>
+                </a:solidFill>
+              </a:rPr>
+              <a:t>NHS England full rollout — cards + ZEUS DOC + AEGIS + registries</a:t>
+            </a:r>
+            <a:endParaRPr lang="en-US" sz="1050" dirty="0"/>
+          </a:p>
+        </p:txBody>
+      </p:sp>
+      <p:sp>
+        <p:nvSpPr>
+          <p:cNvPr id="17" name="Text 15"/>
+          <p:cNvSpPr/>
+          <p:nvPr/>
+        </p:nvSpPr>
+        <p:spPr>
+          <a:xfrm>
+            <a:off x="5577840" y="3017520"/>
+            <a:ext cx="1554480" cy="411480"/>
+          </a:xfrm>
+          <a:prstGeom prst="rect">
+            <a:avLst/>
+          </a:prstGeom>
+          <a:noFill/>
+          <a:ln/>
+        </p:spPr>
+        <p:txBody>
+          <a:bodyPr wrap="square" rtlCol="0" anchor="ctr"/>
+          <a:lstStyle/>
+          <a:p>
+            <a:pPr indent="0" marL="0">
+              <a:buNone/>
+            </a:pPr>
+            <a:r>
+              <a:rPr lang="en-US" sz="1150" b="1" dirty="0">
+                <a:solidFill>
+                  <a:srgbClr val="4FCEE4"/>
+                </a:solidFill>
+              </a:rPr>
+              <a:t>£86M / yr (10yr £865M)</a:t>
+            </a:r>
+            <a:endParaRPr lang="en-US" sz="1150" dirty="0"/>
+          </a:p>
+        </p:txBody>
+      </p:sp>
+      <p:sp>
+        <p:nvSpPr>
+          <p:cNvPr id="18" name="Text 16"/>
+          <p:cNvSpPr/>
+          <p:nvPr/>
+        </p:nvSpPr>
+        <p:spPr>
+          <a:xfrm>
+            <a:off x="7223760" y="3017520"/>
+            <a:ext cx="1371600" cy="411480"/>
+          </a:xfrm>
+          <a:prstGeom prst="rect">
+            <a:avLst/>
+          </a:prstGeom>
+          <a:noFill/>
+          <a:ln/>
+        </p:spPr>
+        <p:txBody>
+          <a:bodyPr wrap="square" rtlCol="0" anchor="ctr"/>
+          <a:lstStyle/>
+          <a:p>
+            <a:pPr indent="0" marL="0">
+              <a:buNone/>
+            </a:pPr>
+            <a:r>
+              <a:rPr lang="en-US" sz="1000" dirty="0">
+                <a:solidFill>
+                  <a:srgbClr val="9AA0AC"/>
+                </a:solidFill>
+              </a:rPr>
+              <a:t>£24.4B · 28.2x ROI</a:t>
+            </a:r>
+            <a:endParaRPr lang="en-US" sz="1000" dirty="0"/>
+          </a:p>
+        </p:txBody>
+      </p:sp>
+      <p:sp>
+        <p:nvSpPr>
+          <p:cNvPr id="19" name="Shape 17"/>
+          <p:cNvSpPr/>
+          <p:nvPr/>
+        </p:nvSpPr>
+        <p:spPr>
+          <a:xfrm>
+            <a:off x="548640" y="3657600"/>
+            <a:ext cx="8046720" cy="621792"/>
+          </a:xfrm>
+          <a:prstGeom prst="roundRect">
+            <a:avLst>
+              <a:gd name="adj" fmla="val 10294"/>
+            </a:avLst>
+          </a:prstGeom>
+          <a:solidFill>
+            <a:srgbClr val="1B2030"/>
+          </a:solidFill>
+          <a:ln w="6350">
+            <a:solidFill>
+              <a:srgbClr val="4FCEE4"/>
+            </a:solidFill>
+            <a:prstDash val="solid"/>
+          </a:ln>
+        </p:spPr>
+      </p:sp>
+      <p:sp>
+        <p:nvSpPr>
+          <p:cNvPr id="20" name="Text 18"/>
+          <p:cNvSpPr/>
+          <p:nvPr/>
+        </p:nvSpPr>
+        <p:spPr>
+          <a:xfrm>
+            <a:off x="731520" y="3749040"/>
+            <a:ext cx="1645920" cy="411480"/>
+          </a:xfrm>
+          <a:prstGeom prst="rect">
+            <a:avLst/>
+          </a:prstGeom>
+          <a:noFill/>
+          <a:ln/>
+        </p:spPr>
+        <p:txBody>
+          <a:bodyPr wrap="square" rtlCol="0" anchor="ctr"/>
+          <a:lstStyle/>
+          <a:p>
+            <a:pPr indent="0" marL="0">
+              <a:buNone/>
+            </a:pPr>
+            <a:r>
+              <a:rPr lang="en-US" sz="1300" b="1" dirty="0">
+                <a:solidFill>
+                  <a:srgbClr val="D9F24B"/>
+                </a:solidFill>
+              </a:rPr>
+              <a:t>White-label</a:t>
+            </a:r>
+            <a:endParaRPr lang="en-US" sz="1300" dirty="0"/>
+          </a:p>
+        </p:txBody>
+      </p:sp>
+      <p:sp>
+        <p:nvSpPr>
+          <p:cNvPr id="21" name="Text 19"/>
+          <p:cNvSpPr/>
+          <p:nvPr/>
+        </p:nvSpPr>
+        <p:spPr>
+          <a:xfrm>
+            <a:off x="2377440" y="3749040"/>
+            <a:ext cx="3108960" cy="411480"/>
+          </a:xfrm>
+          <a:prstGeom prst="rect">
+            <a:avLst/>
+          </a:prstGeom>
+          <a:noFill/>
+          <a:ln/>
+        </p:spPr>
+        <p:txBody>
+          <a:bodyPr wrap="square" rtlCol="0" anchor="ctr"/>
+          <a:lstStyle/>
+          <a:p>
+            <a:pPr indent="0" marL="0">
+              <a:buNone/>
+            </a:pPr>
+            <a:r>
+              <a:rPr lang="en-US" sz="1050" dirty="0">
+                <a:solidFill>
+                  <a:srgbClr val="FFFFFF"/>
+                </a:solidFill>
+              </a:rPr>
+              <a:t>Licence / export — other public sectors, international</a:t>
+            </a:r>
+            <a:endParaRPr lang="en-US" sz="1050" dirty="0"/>
+          </a:p>
+        </p:txBody>
+      </p:sp>
+      <p:sp>
+        <p:nvSpPr>
+          <p:cNvPr id="22" name="Text 20"/>
+          <p:cNvSpPr/>
+          <p:nvPr/>
+        </p:nvSpPr>
+        <p:spPr>
+          <a:xfrm>
+            <a:off x="5577840" y="3749040"/>
+            <a:ext cx="1554480" cy="411480"/>
+          </a:xfrm>
+          <a:prstGeom prst="rect">
+            <a:avLst/>
+          </a:prstGeom>
+          <a:noFill/>
+          <a:ln/>
+        </p:spPr>
+        <p:txBody>
+          <a:bodyPr wrap="square" rtlCol="0" anchor="ctr"/>
+          <a:lstStyle/>
+          <a:p>
+            <a:pPr indent="0" marL="0">
+              <a:buNone/>
+            </a:pPr>
+            <a:r>
+              <a:rPr lang="en-US" sz="1150" b="1" dirty="0">
+                <a:solidFill>
+                  <a:srgbClr val="4FCEE4"/>
+                </a:solidFill>
+              </a:rPr>
+              <a:t>Bespoke</a:t>
+            </a:r>
+            <a:endParaRPr lang="en-US" sz="1150" dirty="0"/>
+          </a:p>
+        </p:txBody>
+      </p:sp>
+      <p:sp>
+        <p:nvSpPr>
+          <p:cNvPr id="23" name="Text 21"/>
+          <p:cNvSpPr/>
+          <p:nvPr/>
+        </p:nvSpPr>
+        <p:spPr>
+          <a:xfrm>
+            <a:off x="7223760" y="3749040"/>
+            <a:ext cx="1371600" cy="411480"/>
+          </a:xfrm>
+          <a:prstGeom prst="rect">
+            <a:avLst/>
+          </a:prstGeom>
+          <a:noFill/>
+          <a:ln/>
+        </p:spPr>
+        <p:txBody>
+          <a:bodyPr wrap="square" rtlCol="0" anchor="ctr"/>
+          <a:lstStyle/>
+          <a:p>
+            <a:pPr indent="0" marL="0">
+              <a:buNone/>
+            </a:pPr>
+            <a:r>
+              <a:rPr lang="en-US" sz="1000" dirty="0">
+                <a:solidFill>
+                  <a:srgbClr val="9AA0AC"/>
+                </a:solidFill>
+              </a:rPr>
+              <a:t>Recurring licence</a:t>
+            </a:r>
+            <a:endParaRPr lang="en-US" sz="1000" dirty="0"/>
+          </a:p>
+        </p:txBody>
+      </p:sp>
+      <p:sp>
+        <p:nvSpPr>
+          <p:cNvPr id="24" name="Text 22"/>
+          <p:cNvSpPr/>
+          <p:nvPr/>
+        </p:nvSpPr>
+        <p:spPr>
+          <a:xfrm>
+            <a:off x="548640" y="4526280"/>
+            <a:ext cx="8046720" cy="365760"/>
+          </a:xfrm>
+          <a:prstGeom prst="rect">
+            <a:avLst/>
+          </a:prstGeom>
+          <a:noFill/>
+          <a:ln/>
+        </p:spPr>
+        <p:txBody>
+          <a:bodyPr wrap="square" rtlCol="0" anchor="ctr"/>
+          <a:lstStyle/>
+          <a:p>
+            <a:pPr indent="0" marL="0">
+              <a:buNone/>
+            </a:pPr>
+            <a:r>
+              <a:rPr lang="en-US" sz="1250" b="1" dirty="0">
+                <a:solidFill>
+                  <a:srgbClr val="D9F24B"/>
+                </a:solidFill>
+              </a:rPr>
+              <a:t>Break-even at each tier covered by efficiency gains: signatures, consent automation, fraud reduction.</a:t>
+            </a:r>
+            <a:endParaRPr lang="en-US" sz="1250" dirty="0"/>
+          </a:p>
+        </p:txBody>
+      </p:sp>
+      <p:sp>
+        <p:nvSpPr>
+          <p:cNvPr id="25" name="Text 23"/>
+          <p:cNvSpPr/>
+          <p:nvPr/>
+        </p:nvSpPr>
+        <p:spPr>
+          <a:xfrm>
+            <a:off x="365760" y="4864608"/>
+            <a:ext cx="7315200" cy="274320"/>
+          </a:xfrm>
+          <a:prstGeom prst="rect">
+            <a:avLst/>
+          </a:prstGeom>
+          <a:noFill/>
+          <a:ln/>
+        </p:spPr>
+        <p:txBody>
+          <a:bodyPr wrap="square" rtlCol="0" anchor="ctr"/>
+          <a:lstStyle/>
+          <a:p>
+            <a:pPr indent="0" marL="0">
+              <a:buNone/>
+            </a:pPr>
+            <a:r>
+              <a:rPr lang="en-US" sz="800" dirty="0">
+                <a:solidFill>
+                  <a:srgbClr val="9AA0AC"/>
+                </a:solidFill>
+              </a:rPr>
+              <a:t>ZEUSTA · ZEUS DOC · AEGIS — All IP belongs to JDB Sales</a:t>
+            </a:r>
+            <a:endParaRPr lang="en-US" sz="800" dirty="0"/>
+          </a:p>
+        </p:txBody>
+      </p:sp>
+      <p:sp>
+        <p:nvSpPr>
+          <p:cNvPr id="26" name="Text 24"/>
+          <p:cNvSpPr/>
+          <p:nvPr/>
+        </p:nvSpPr>
+        <p:spPr>
+          <a:xfrm>
+            <a:off x="8503920" y="4864608"/>
+            <a:ext cx="365760" cy="274320"/>
+          </a:xfrm>
+          <a:prstGeom prst="rect">
+            <a:avLst/>
+          </a:prstGeom>
+          <a:noFill/>
+          <a:ln/>
+        </p:spPr>
+        <p:txBody>
+          <a:bodyPr wrap="square" rtlCol="0" anchor="ctr"/>
+          <a:lstStyle/>
+          <a:p>
+            <a:pPr algn="r" indent="0" marL="0">
+              <a:buNone/>
+            </a:pPr>
+            <a:r>
+              <a:rPr lang="en-US" sz="800" dirty="0">
+                <a:solidFill>
+                  <a:srgbClr val="9AA0AC"/>
+                </a:solidFill>
+              </a:rPr>
+              <a:t>8</a:t>
+            </a:r>
+            <a:endParaRPr lang="en-US" sz="800" dirty="0"/>
+          </a:p>
+        </p:txBody>
+      </p:sp>
+    </p:spTree>
+  </p:cSld>
+  <p:clrMapOvr>
+    <a:masterClrMapping/>
+  </p:clrMapOvr>
+</p:sld>
+</file>
+
+<file path=ppt/slides/slide9.xml><?xml version="1.0" encoding="utf-8"?>
+<p:sld xmlns:a="http://schemas.openxmlformats.org/drawingml/2006/main" xmlns:r="http://schemas.openxmlformats.org/officeDocument/2006/relationships" xmlns:p="http://schemas.openxmlformats.org/presentationml/2006/main">
+  <p:cSld name="Slide 9">
+    <p:bg>
+      <p:bgPr>
+        <a:solidFill>
+          <a:srgbClr val="10131B"/>
+        </a:solidFill>
+      </p:bgPr>
+    </p:bg>
+    <p:spTree>
+      <p:nvGrpSpPr>
+        <p:cNvPr id="1" name=""/>
+        <p:cNvGrpSpPr/>
+        <p:nvPr/>
+      </p:nvGrpSpPr>
+      <p:grpSpPr>
+        <a:xfrm>
+          <a:off x="0" y="0"/>
+          <a:ext cx="0" cy="0"/>
+          <a:chOff x="0" y="0"/>
+          <a:chExt cx="0" cy="0"/>
+        </a:xfrm>
+      </p:grpSpPr>
+      <p:sp>
+        <p:nvSpPr>
+          <p:cNvPr id="2" name="Text 0"/>
+          <p:cNvSpPr/>
+          <p:nvPr/>
+        </p:nvSpPr>
+        <p:spPr>
+          <a:xfrm>
+            <a:off x="548640" y="411480"/>
+            <a:ext cx="8046720" cy="457200"/>
+          </a:xfrm>
+          <a:prstGeom prst="rect">
+            <a:avLst/>
+          </a:prstGeom>
+          <a:noFill/>
+          <a:ln/>
+        </p:spPr>
+        <p:txBody>
+          <a:bodyPr wrap="square" rtlCol="0" anchor="ctr"/>
+          <a:lstStyle/>
+          <a:p>
+            <a:pPr indent="0" marL="0">
+              <a:buNone/>
+            </a:pPr>
+            <a:r>
+              <a:rPr lang="en-US" sz="2200" b="1" dirty="0">
+                <a:solidFill>
+                  <a:srgbClr val="4FCEE4"/>
+                </a:solidFill>
+              </a:rPr>
               <a:t>COMMERCIAL &amp; NEXT STEPS</a:t>
             </a:r>
             <a:endParaRPr lang="en-US" sz="2200" dirty="0"/>
@@ -6623,7 +7419,7 @@
                   <a:srgbClr val="9AA0AC"/>
                 </a:solidFill>
               </a:rPr>
-              <a:t>8</a:t>
+              <a:t>9</a:t>
             </a:r>
             <a:endParaRPr lang="en-US" sz="800" dirty="0"/>
           </a:p>
